--- a/第2章.pptx
+++ b/第2章.pptx
@@ -5,7 +5,7 @@
     <p:sldMasterId id="2147483648" r:id="rId1"/>
   </p:sldMasterIdLst>
   <p:notesMasterIdLst>
-    <p:notesMasterId r:id="rId47"/>
+    <p:notesMasterId r:id="rId50"/>
   </p:notesMasterIdLst>
   <p:sldIdLst>
     <p:sldId id="256" r:id="rId2"/>
@@ -53,6 +53,9 @@
     <p:sldId id="310" r:id="rId44"/>
     <p:sldId id="311" r:id="rId45"/>
     <p:sldId id="312" r:id="rId46"/>
+    <p:sldId id="313" r:id="rId47"/>
+    <p:sldId id="314" r:id="rId48"/>
+    <p:sldId id="315" r:id="rId49"/>
   </p:sldIdLst>
   <p:sldSz cx="12192000" cy="6858000"/>
   <p:notesSz cx="6858000" cy="9144000"/>
@@ -241,7 +244,7 @@
           <a:p>
             <a:fld id="{C06B2F65-64AE-4678-96EC-3A836C386FBA}" type="datetimeFigureOut">
               <a:rPr kumimoji="1" lang="ja-JP" altLang="en-US" smtClean="0"/>
-              <a:t>2025/11/23</a:t>
+              <a:t>2025/12/22</a:t>
             </a:fld>
             <a:endParaRPr kumimoji="1" lang="ja-JP" altLang="en-US"/>
           </a:p>
@@ -669,7 +672,7 @@
           <a:p>
             <a:fld id="{4862ADAC-14D0-4FE5-975F-B23D4C382902}" type="datetimeFigureOut">
               <a:rPr kumimoji="1" lang="ja-JP" altLang="en-US" smtClean="0"/>
-              <a:t>2025/11/23</a:t>
+              <a:t>2025/12/22</a:t>
             </a:fld>
             <a:endParaRPr kumimoji="1" lang="ja-JP" altLang="en-US"/>
           </a:p>
@@ -869,7 +872,7 @@
           <a:p>
             <a:fld id="{4862ADAC-14D0-4FE5-975F-B23D4C382902}" type="datetimeFigureOut">
               <a:rPr kumimoji="1" lang="ja-JP" altLang="en-US" smtClean="0"/>
-              <a:t>2025/11/23</a:t>
+              <a:t>2025/12/22</a:t>
             </a:fld>
             <a:endParaRPr kumimoji="1" lang="ja-JP" altLang="en-US"/>
           </a:p>
@@ -1079,7 +1082,7 @@
           <a:p>
             <a:fld id="{4862ADAC-14D0-4FE5-975F-B23D4C382902}" type="datetimeFigureOut">
               <a:rPr kumimoji="1" lang="ja-JP" altLang="en-US" smtClean="0"/>
-              <a:t>2025/11/23</a:t>
+              <a:t>2025/12/22</a:t>
             </a:fld>
             <a:endParaRPr kumimoji="1" lang="ja-JP" altLang="en-US"/>
           </a:p>
@@ -1279,7 +1282,7 @@
           <a:p>
             <a:fld id="{4862ADAC-14D0-4FE5-975F-B23D4C382902}" type="datetimeFigureOut">
               <a:rPr kumimoji="1" lang="ja-JP" altLang="en-US" smtClean="0"/>
-              <a:t>2025/11/23</a:t>
+              <a:t>2025/12/22</a:t>
             </a:fld>
             <a:endParaRPr kumimoji="1" lang="ja-JP" altLang="en-US"/>
           </a:p>
@@ -1524,7 +1527,7 @@
           <a:p>
             <a:fld id="{4862ADAC-14D0-4FE5-975F-B23D4C382902}" type="datetimeFigureOut">
               <a:rPr kumimoji="1" lang="ja-JP" altLang="en-US" smtClean="0"/>
-              <a:t>2025/11/23</a:t>
+              <a:t>2025/12/22</a:t>
             </a:fld>
             <a:endParaRPr kumimoji="1" lang="ja-JP" altLang="en-US"/>
           </a:p>
@@ -1817,7 +1820,7 @@
           <a:p>
             <a:fld id="{4862ADAC-14D0-4FE5-975F-B23D4C382902}" type="datetimeFigureOut">
               <a:rPr kumimoji="1" lang="ja-JP" altLang="en-US" smtClean="0"/>
-              <a:t>2025/11/23</a:t>
+              <a:t>2025/12/22</a:t>
             </a:fld>
             <a:endParaRPr kumimoji="1" lang="ja-JP" altLang="en-US"/>
           </a:p>
@@ -2245,7 +2248,7 @@
           <a:p>
             <a:fld id="{4862ADAC-14D0-4FE5-975F-B23D4C382902}" type="datetimeFigureOut">
               <a:rPr kumimoji="1" lang="ja-JP" altLang="en-US" smtClean="0"/>
-              <a:t>2025/11/23</a:t>
+              <a:t>2025/12/22</a:t>
             </a:fld>
             <a:endParaRPr kumimoji="1" lang="ja-JP" altLang="en-US"/>
           </a:p>
@@ -2362,7 +2365,7 @@
           <a:p>
             <a:fld id="{4862ADAC-14D0-4FE5-975F-B23D4C382902}" type="datetimeFigureOut">
               <a:rPr kumimoji="1" lang="ja-JP" altLang="en-US" smtClean="0"/>
-              <a:t>2025/11/23</a:t>
+              <a:t>2025/12/22</a:t>
             </a:fld>
             <a:endParaRPr kumimoji="1" lang="ja-JP" altLang="en-US"/>
           </a:p>
@@ -2457,7 +2460,7 @@
           <a:p>
             <a:fld id="{4862ADAC-14D0-4FE5-975F-B23D4C382902}" type="datetimeFigureOut">
               <a:rPr kumimoji="1" lang="ja-JP" altLang="en-US" smtClean="0"/>
-              <a:t>2025/11/23</a:t>
+              <a:t>2025/12/22</a:t>
             </a:fld>
             <a:endParaRPr kumimoji="1" lang="ja-JP" altLang="en-US"/>
           </a:p>
@@ -2764,7 +2767,7 @@
           <a:p>
             <a:fld id="{4862ADAC-14D0-4FE5-975F-B23D4C382902}" type="datetimeFigureOut">
               <a:rPr kumimoji="1" lang="ja-JP" altLang="en-US" smtClean="0"/>
-              <a:t>2025/11/23</a:t>
+              <a:t>2025/12/22</a:t>
             </a:fld>
             <a:endParaRPr kumimoji="1" lang="ja-JP" altLang="en-US"/>
           </a:p>
@@ -3016,7 +3019,7 @@
           <a:p>
             <a:fld id="{4862ADAC-14D0-4FE5-975F-B23D4C382902}" type="datetimeFigureOut">
               <a:rPr kumimoji="1" lang="ja-JP" altLang="en-US" smtClean="0"/>
-              <a:t>2025/11/23</a:t>
+              <a:t>2025/12/22</a:t>
             </a:fld>
             <a:endParaRPr kumimoji="1" lang="ja-JP" altLang="en-US"/>
           </a:p>
@@ -3259,7 +3262,7 @@
           <a:p>
             <a:fld id="{4862ADAC-14D0-4FE5-975F-B23D4C382902}" type="datetimeFigureOut">
               <a:rPr kumimoji="1" lang="ja-JP" altLang="en-US" smtClean="0"/>
-              <a:t>2025/11/23</a:t>
+              <a:t>2025/12/22</a:t>
             </a:fld>
             <a:endParaRPr kumimoji="1" lang="ja-JP" altLang="en-US"/>
           </a:p>
@@ -15302,8 +15305,8 @@
           </a:p>
         </p:txBody>
       </p:sp>
-      <mc:AlternateContent xmlns:mc="http://schemas.openxmlformats.org/markup-compatibility/2006">
-        <mc:Choice xmlns:a14="http://schemas.microsoft.com/office/drawing/2010/main" Requires="a14">
+      <mc:AlternateContent xmlns:mc="http://schemas.openxmlformats.org/markup-compatibility/2006" xmlns:a14="http://schemas.microsoft.com/office/drawing/2010/main">
+        <mc:Choice Requires="a14">
           <p:sp>
             <p:nvSpPr>
               <p:cNvPr id="3" name="コンテンツ プレースホルダー 2">
@@ -16270,7 +16273,7 @@
             </p:txBody>
           </p:sp>
         </mc:Choice>
-        <mc:Fallback>
+        <mc:Fallback xmlns="">
           <p:sp>
             <p:nvSpPr>
               <p:cNvPr id="3" name="コンテンツ プレースホルダー 2">
@@ -27075,8 +27078,8 @@
           </a:p>
         </p:txBody>
       </p:sp>
-      <mc:AlternateContent xmlns:mc="http://schemas.openxmlformats.org/markup-compatibility/2006">
-        <mc:Choice xmlns:a14="http://schemas.microsoft.com/office/drawing/2010/main" Requires="a14">
+      <mc:AlternateContent xmlns:mc="http://schemas.openxmlformats.org/markup-compatibility/2006" xmlns:a14="http://schemas.microsoft.com/office/drawing/2010/main">
+        <mc:Choice Requires="a14">
           <p:sp>
             <p:nvSpPr>
               <p:cNvPr id="3" name="コンテンツ プレースホルダー 2">
@@ -28044,7 +28047,7 @@
             </p:txBody>
           </p:sp>
         </mc:Choice>
-        <mc:Fallback>
+        <mc:Fallback xmlns="">
           <p:sp>
             <p:nvSpPr>
               <p:cNvPr id="3" name="コンテンツ プレースホルダー 2">
@@ -28164,8 +28167,8 @@
           </a:p>
         </p:txBody>
       </p:sp>
-      <mc:AlternateContent xmlns:mc="http://schemas.openxmlformats.org/markup-compatibility/2006">
-        <mc:Choice xmlns:a14="http://schemas.microsoft.com/office/drawing/2010/main" Requires="a14">
+      <mc:AlternateContent xmlns:mc="http://schemas.openxmlformats.org/markup-compatibility/2006" xmlns:a14="http://schemas.microsoft.com/office/drawing/2010/main">
+        <mc:Choice Requires="a14">
           <p:sp>
             <p:nvSpPr>
               <p:cNvPr id="3" name="コンテンツ プレースホルダー 2">
@@ -28892,7 +28895,7 @@
             </p:txBody>
           </p:sp>
         </mc:Choice>
-        <mc:Fallback>
+        <mc:Fallback xmlns="">
           <p:sp>
             <p:nvSpPr>
               <p:cNvPr id="3" name="コンテンツ プレースホルダー 2">
@@ -28936,8 +28939,8 @@
           </p:sp>
         </mc:Fallback>
       </mc:AlternateContent>
-      <mc:AlternateContent xmlns:mc="http://schemas.openxmlformats.org/markup-compatibility/2006">
-        <mc:Choice xmlns:a14="http://schemas.microsoft.com/office/drawing/2010/main" Requires="a14">
+      <mc:AlternateContent xmlns:mc="http://schemas.openxmlformats.org/markup-compatibility/2006" xmlns:a14="http://schemas.microsoft.com/office/drawing/2010/main">
+        <mc:Choice Requires="a14">
           <p:sp>
             <p:nvSpPr>
               <p:cNvPr id="4" name="テキスト ボックス 3">
@@ -29016,7 +29019,7 @@
             </p:txBody>
           </p:sp>
         </mc:Choice>
-        <mc:Fallback>
+        <mc:Fallback xmlns="">
           <p:sp>
             <p:nvSpPr>
               <p:cNvPr id="4" name="テキスト ボックス 3">
@@ -29137,8 +29140,8 @@
           </a:p>
         </p:txBody>
       </p:sp>
-      <mc:AlternateContent xmlns:mc="http://schemas.openxmlformats.org/markup-compatibility/2006">
-        <mc:Choice xmlns:a14="http://schemas.microsoft.com/office/drawing/2010/main" Requires="a14">
+      <mc:AlternateContent xmlns:mc="http://schemas.openxmlformats.org/markup-compatibility/2006" xmlns:a14="http://schemas.microsoft.com/office/drawing/2010/main">
+        <mc:Choice Requires="a14">
           <p:sp>
             <p:nvSpPr>
               <p:cNvPr id="3" name="コンテンツ プレースホルダー 2">
@@ -29327,7 +29330,7 @@
                       <m:sSub>
                         <m:sSubPr>
                           <m:ctrlPr>
-                            <a:rPr lang="en-US" altLang="ja-JP" sz="2000" b="0" i="0" smtClean="0">
+                            <a:rPr lang="en-US" altLang="ja-JP" sz="2000" b="0" i="1" smtClean="0">
                               <a:latin typeface="Cambria Math" panose="02040503050406030204" pitchFamily="18" charset="0"/>
                             </a:rPr>
                           </m:ctrlPr>
@@ -29357,7 +29360,7 @@
                           <m:begChr m:val="["/>
                           <m:endChr m:val="]"/>
                           <m:ctrlPr>
-                            <a:rPr lang="en-US" altLang="ja-JP" sz="2000" b="0" i="0" smtClean="0">
+                            <a:rPr lang="en-US" altLang="ja-JP" sz="2000" b="0" i="1" smtClean="0">
                               <a:latin typeface="Cambria Math" panose="02040503050406030204" pitchFamily="18" charset="0"/>
                             </a:rPr>
                           </m:ctrlPr>
@@ -29451,7 +29454,7 @@
                           <m:sSub>
                             <m:sSubPr>
                               <m:ctrlPr>
-                                <a:rPr lang="en-US" altLang="ja-JP" sz="2000" b="0" i="0" smtClean="0">
+                                <a:rPr lang="en-US" altLang="ja-JP" sz="2000" b="0" i="1" smtClean="0">
                                   <a:latin typeface="Cambria Math" panose="02040503050406030204" pitchFamily="18" charset="0"/>
                                 </a:rPr>
                               </m:ctrlPr>
@@ -31150,7 +31153,7 @@
                     <m:sSub>
                       <m:sSubPr>
                         <m:ctrlPr>
-                          <a:rPr lang="en-US" altLang="ja-JP" sz="2000" b="0" i="0" smtClean="0">
+                          <a:rPr lang="en-US" altLang="ja-JP" sz="2000" b="0" i="1" smtClean="0">
                             <a:latin typeface="Cambria Math" panose="02040503050406030204" pitchFamily="18" charset="0"/>
                           </a:rPr>
                         </m:ctrlPr>
@@ -31375,7 +31378,7 @@
             </p:txBody>
           </p:sp>
         </mc:Choice>
-        <mc:Fallback>
+        <mc:Fallback xmlns="">
           <p:sp>
             <p:nvSpPr>
               <p:cNvPr id="3" name="コンテンツ プレースホルダー 2">
@@ -31564,8 +31567,8 @@
           </a:p>
         </p:txBody>
       </p:sp>
-      <mc:AlternateContent xmlns:mc="http://schemas.openxmlformats.org/markup-compatibility/2006">
-        <mc:Choice xmlns:a14="http://schemas.microsoft.com/office/drawing/2010/main" Requires="a14">
+      <mc:AlternateContent xmlns:mc="http://schemas.openxmlformats.org/markup-compatibility/2006" xmlns:a14="http://schemas.microsoft.com/office/drawing/2010/main">
+        <mc:Choice Requires="a14">
           <p:sp>
             <p:nvSpPr>
               <p:cNvPr id="3" name="コンテンツ プレースホルダー 2">
@@ -32111,13 +32114,7 @@
                       <a:rPr lang="en-US" altLang="ja-JP" sz="2000" i="1" dirty="0">
                         <a:latin typeface="Cambria Math" panose="02040503050406030204" pitchFamily="18" charset="0"/>
                       </a:rPr>
-                      <m:t>=</m:t>
-                    </m:r>
-                    <m:r>
-                      <a:rPr lang="en-US" altLang="ja-JP" sz="2000" i="1" dirty="0">
-                        <a:latin typeface="Cambria Math" panose="02040503050406030204" pitchFamily="18" charset="0"/>
-                      </a:rPr>
-                      <m:t>1</m:t>
+                      <m:t>=1</m:t>
                     </m:r>
                   </m:oMath>
                 </a14:m>
@@ -32788,13 +32785,7 @@
                       <a:rPr lang="en-US" altLang="ja-JP" sz="2000" i="1" dirty="0">
                         <a:latin typeface="Cambria Math" panose="02040503050406030204" pitchFamily="18" charset="0"/>
                       </a:rPr>
-                      <m:t>=</m:t>
-                    </m:r>
-                    <m:r>
-                      <a:rPr lang="en-US" altLang="ja-JP" sz="2000" i="1" dirty="0">
-                        <a:latin typeface="Cambria Math" panose="02040503050406030204" pitchFamily="18" charset="0"/>
-                      </a:rPr>
-                      <m:t>1</m:t>
+                      <m:t>=1</m:t>
                     </m:r>
                   </m:oMath>
                 </a14:m>
@@ -33031,7 +33022,7 @@
             </p:txBody>
           </p:sp>
         </mc:Choice>
-        <mc:Fallback>
+        <mc:Fallback xmlns="">
           <p:sp>
             <p:nvSpPr>
               <p:cNvPr id="3" name="コンテンツ プレースホルダー 2">
@@ -33151,8 +33142,8 @@
           </a:p>
         </p:txBody>
       </p:sp>
-      <mc:AlternateContent xmlns:mc="http://schemas.openxmlformats.org/markup-compatibility/2006">
-        <mc:Choice xmlns:a14="http://schemas.microsoft.com/office/drawing/2010/main" Requires="a14">
+      <mc:AlternateContent xmlns:mc="http://schemas.openxmlformats.org/markup-compatibility/2006" xmlns:a14="http://schemas.microsoft.com/office/drawing/2010/main">
+        <mc:Choice Requires="a14">
           <p:sp>
             <p:nvSpPr>
               <p:cNvPr id="3" name="コンテンツ プレースホルダー 2">
@@ -35760,7 +35751,7 @@
             </p:txBody>
           </p:sp>
         </mc:Choice>
-        <mc:Fallback>
+        <mc:Fallback xmlns="">
           <p:sp>
             <p:nvSpPr>
               <p:cNvPr id="3" name="コンテンツ プレースホルダー 2">
@@ -35880,8 +35871,8 @@
           </a:p>
         </p:txBody>
       </p:sp>
-      <mc:AlternateContent xmlns:mc="http://schemas.openxmlformats.org/markup-compatibility/2006">
-        <mc:Choice xmlns:a14="http://schemas.microsoft.com/office/drawing/2010/main" Requires="a14">
+      <mc:AlternateContent xmlns:mc="http://schemas.openxmlformats.org/markup-compatibility/2006" xmlns:a14="http://schemas.microsoft.com/office/drawing/2010/main">
+        <mc:Choice Requires="a14">
           <p:sp>
             <p:nvSpPr>
               <p:cNvPr id="3" name="コンテンツ プレースホルダー 2">
@@ -36017,7 +36008,7 @@
             </p:txBody>
           </p:sp>
         </mc:Choice>
-        <mc:Fallback>
+        <mc:Fallback xmlns="">
           <p:sp>
             <p:nvSpPr>
               <p:cNvPr id="3" name="コンテンツ プレースホルダー 2">
@@ -36473,8 +36464,8 @@
           </a:p>
         </p:txBody>
       </p:sp>
-      <mc:AlternateContent xmlns:mc="http://schemas.openxmlformats.org/markup-compatibility/2006">
-        <mc:Choice xmlns:a14="http://schemas.microsoft.com/office/drawing/2010/main" Requires="a14">
+      <mc:AlternateContent xmlns:mc="http://schemas.openxmlformats.org/markup-compatibility/2006" xmlns:a14="http://schemas.microsoft.com/office/drawing/2010/main">
+        <mc:Choice Requires="a14">
           <p:sp>
             <p:nvSpPr>
               <p:cNvPr id="12" name="四角形: 角を丸くする 11">
@@ -36792,7 +36783,7 @@
             </p:txBody>
           </p:sp>
         </mc:Choice>
-        <mc:Fallback>
+        <mc:Fallback xmlns="">
           <p:sp>
             <p:nvSpPr>
               <p:cNvPr id="12" name="四角形: 角を丸くする 11">
@@ -36898,8 +36889,8 @@
           </a:p>
         </p:txBody>
       </p:sp>
-      <mc:AlternateContent xmlns:mc="http://schemas.openxmlformats.org/markup-compatibility/2006">
-        <mc:Choice xmlns:a14="http://schemas.microsoft.com/office/drawing/2010/main" Requires="a14">
+      <mc:AlternateContent xmlns:mc="http://schemas.openxmlformats.org/markup-compatibility/2006" xmlns:a14="http://schemas.microsoft.com/office/drawing/2010/main">
+        <mc:Choice Requires="a14">
           <p:sp>
             <p:nvSpPr>
               <p:cNvPr id="14" name="四角形: 角を丸くする 13">
@@ -36942,6 +36933,7 @@
               <a:bodyPr rtlCol="0" anchor="ctr"/>
               <a:lstStyle/>
               <a:p>
+                <a:pPr/>
                 <a14:m>
                   <m:oMathPara xmlns:m="http://schemas.openxmlformats.org/officeDocument/2006/math">
                     <m:oMathParaPr>
@@ -37395,7 +37387,7 @@
             </p:txBody>
           </p:sp>
         </mc:Choice>
-        <mc:Fallback>
+        <mc:Fallback xmlns="">
           <p:sp>
             <p:nvSpPr>
               <p:cNvPr id="14" name="四角形: 角を丸くする 13">
@@ -37651,24 +37643,2872 @@
           <a:p>
             <a:r>
               <a:rPr lang="en-US" altLang="ja-JP" sz="2800" dirty="0"/>
-              <a:t>§5.2</a:t>
+              <a:t>§6.1</a:t>
             </a:r>
             <a:r>
               <a:rPr lang="ja-JP" altLang="en-US" sz="2800" dirty="0"/>
-              <a:t>　無限期間のケース</a:t>
+              <a:t>　無リスク利子率の期間ごとの変化</a:t>
             </a:r>
             <a:endParaRPr kumimoji="1" lang="ja-JP" altLang="en-US" sz="2800" dirty="0"/>
           </a:p>
         </p:txBody>
       </p:sp>
-      <mc:AlternateContent xmlns:mc="http://schemas.openxmlformats.org/markup-compatibility/2006">
-        <mc:Choice xmlns:a14="http://schemas.microsoft.com/office/drawing/2010/main" Requires="a14">
+      <p:sp>
+        <p:nvSpPr>
+          <p:cNvPr id="3" name="コンテンツ プレースホルダー 2">
+            <a:extLst>
+              <a:ext uri="{FF2B5EF4-FFF2-40B4-BE49-F238E27FC236}">
+                <a16:creationId xmlns:a16="http://schemas.microsoft.com/office/drawing/2014/main" id="{09B0E752-DFEC-9A62-5738-6551A6206C1D}"/>
+              </a:ext>
+            </a:extLst>
+          </p:cNvPr>
+          <p:cNvSpPr>
+            <a:spLocks noGrp="1"/>
+          </p:cNvSpPr>
+          <p:nvPr>
+            <p:ph idx="1"/>
+          </p:nvPr>
+        </p:nvSpPr>
+        <p:spPr>
+          <a:xfrm>
+            <a:off x="838199" y="1065476"/>
+            <a:ext cx="10673443" cy="5678224"/>
+          </a:xfrm>
+        </p:spPr>
+        <p:txBody>
+          <a:bodyPr>
+            <a:normAutofit/>
+          </a:bodyPr>
+          <a:lstStyle/>
+          <a:p>
+            <a:pPr marL="0" indent="0">
+              <a:buNone/>
+            </a:pPr>
+            <a:r>
+              <a:rPr lang="en-US" altLang="ja-JP" sz="2000" dirty="0"/>
+              <a:t>【1</a:t>
+            </a:r>
+            <a:r>
+              <a:rPr lang="ja-JP" altLang="en-US" sz="2000" dirty="0"/>
+              <a:t>期間モデルにおける無リスク資産</a:t>
+            </a:r>
+            <a:r>
+              <a:rPr lang="en-US" altLang="ja-JP" sz="2000" dirty="0"/>
+              <a:t>】</a:t>
+            </a:r>
+          </a:p>
+          <a:p>
+            <a:pPr marL="0" indent="0">
+              <a:buNone/>
+            </a:pPr>
+            <a:r>
+              <a:rPr lang="ja-JP" altLang="en-US" sz="2000" dirty="0"/>
+              <a:t>期初において期末の収益が確定している。</a:t>
+            </a:r>
+            <a:endParaRPr lang="en-US" altLang="ja-JP" sz="2000" dirty="0"/>
+          </a:p>
+          <a:p>
+            <a:pPr marL="0" indent="0">
+              <a:buNone/>
+            </a:pPr>
+            <a:endParaRPr lang="en-US" altLang="ja-JP" sz="2000" dirty="0"/>
+          </a:p>
+          <a:p>
+            <a:pPr marL="0" indent="0">
+              <a:buNone/>
+            </a:pPr>
+            <a:r>
+              <a:rPr lang="en-US" altLang="ja-JP" sz="2000" dirty="0"/>
+              <a:t>【</a:t>
+            </a:r>
+            <a:r>
+              <a:rPr lang="ja-JP" altLang="en-US" sz="2000" dirty="0"/>
+              <a:t>多期間モデルにおける無リスク資産</a:t>
+            </a:r>
+            <a:r>
+              <a:rPr lang="en-US" altLang="ja-JP" sz="2000" dirty="0"/>
+              <a:t>】</a:t>
+            </a:r>
+          </a:p>
+          <a:p>
+            <a:pPr marL="0" indent="0">
+              <a:buNone/>
+            </a:pPr>
+            <a:r>
+              <a:rPr lang="ja-JP" altLang="en-US" sz="2000" dirty="0"/>
+              <a:t>ある</a:t>
+            </a:r>
+            <a:r>
+              <a:rPr lang="en-US" altLang="ja-JP" sz="2000" dirty="0"/>
+              <a:t>1</a:t>
+            </a:r>
+            <a:r>
+              <a:rPr lang="ja-JP" altLang="en-US" sz="2000" dirty="0"/>
+              <a:t>期間において、期初時点に立った時に、次期の期初における収益が実現しうるすべての世の中の状態において同一であるような資産</a:t>
+            </a:r>
+            <a:endParaRPr lang="en-US" altLang="ja-JP" sz="2000" dirty="0"/>
+          </a:p>
+        </p:txBody>
+      </p:sp>
+      <p:sp>
+        <p:nvSpPr>
+          <p:cNvPr id="4" name="フローチャート: 結合子 3">
+            <a:extLst>
+              <a:ext uri="{FF2B5EF4-FFF2-40B4-BE49-F238E27FC236}">
+                <a16:creationId xmlns:a16="http://schemas.microsoft.com/office/drawing/2014/main" id="{22F99008-786B-3B90-F50C-747490826AB7}"/>
+              </a:ext>
+            </a:extLst>
+          </p:cNvPr>
+          <p:cNvSpPr/>
+          <p:nvPr/>
+        </p:nvSpPr>
+        <p:spPr>
+          <a:xfrm>
+            <a:off x="2013858" y="4936671"/>
+            <a:ext cx="152399" cy="141516"/>
+          </a:xfrm>
+          <a:prstGeom prst="flowChartConnector">
+            <a:avLst/>
+          </a:prstGeom>
+          <a:solidFill>
+            <a:schemeClr val="tx1"/>
+          </a:solidFill>
+        </p:spPr>
+        <p:style>
+          <a:lnRef idx="2">
+            <a:schemeClr val="accent1">
+              <a:shade val="15000"/>
+            </a:schemeClr>
+          </a:lnRef>
+          <a:fillRef idx="1">
+            <a:schemeClr val="accent1"/>
+          </a:fillRef>
+          <a:effectRef idx="0">
+            <a:schemeClr val="accent1"/>
+          </a:effectRef>
+          <a:fontRef idx="minor">
+            <a:schemeClr val="lt1"/>
+          </a:fontRef>
+        </p:style>
+        <p:txBody>
+          <a:bodyPr rtlCol="0" anchor="ctr"/>
+          <a:lstStyle/>
+          <a:p>
+            <a:pPr algn="ctr"/>
+            <a:endParaRPr kumimoji="1" lang="ja-JP" altLang="en-US"/>
+          </a:p>
+        </p:txBody>
+      </p:sp>
+      <mc:AlternateContent xmlns:mc="http://schemas.openxmlformats.org/markup-compatibility/2006" xmlns:a14="http://schemas.microsoft.com/office/drawing/2010/main">
+        <mc:Choice Requires="a14">
+          <p:sp>
+            <p:nvSpPr>
+              <p:cNvPr id="5" name="テキスト ボックス 4">
+                <a:extLst>
+                  <a:ext uri="{FF2B5EF4-FFF2-40B4-BE49-F238E27FC236}">
+                    <a16:creationId xmlns:a16="http://schemas.microsoft.com/office/drawing/2014/main" id="{562642B7-45C9-680F-2045-180A76378326}"/>
+                  </a:ext>
+                </a:extLst>
+              </p:cNvPr>
+              <p:cNvSpPr txBox="1"/>
+              <p:nvPr/>
+            </p:nvSpPr>
+            <p:spPr>
+              <a:xfrm>
+                <a:off x="1805669" y="5078187"/>
+                <a:ext cx="568778" cy="369332"/>
+              </a:xfrm>
+              <a:prstGeom prst="rect">
+                <a:avLst/>
+              </a:prstGeom>
+              <a:noFill/>
+            </p:spPr>
+            <p:txBody>
+              <a:bodyPr wrap="square" rtlCol="0">
+                <a:spAutoFit/>
+              </a:bodyPr>
+              <a:lstStyle/>
+              <a:p>
+                <a:pPr/>
+                <a14:m>
+                  <m:oMathPara xmlns:m="http://schemas.openxmlformats.org/officeDocument/2006/math">
+                    <m:oMathParaPr>
+                      <m:jc m:val="centerGroup"/>
+                    </m:oMathParaPr>
+                    <m:oMath xmlns:m="http://schemas.openxmlformats.org/officeDocument/2006/math">
+                      <m:sSub>
+                        <m:sSubPr>
+                          <m:ctrlPr>
+                            <a:rPr kumimoji="1" lang="en-US" altLang="ja-JP" b="0" i="1" smtClean="0">
+                              <a:latin typeface="Cambria Math" panose="02040503050406030204" pitchFamily="18" charset="0"/>
+                            </a:rPr>
+                          </m:ctrlPr>
+                        </m:sSubPr>
+                        <m:e>
+                          <m:r>
+                            <a:rPr kumimoji="1" lang="en-US" altLang="ja-JP" b="0" i="1" smtClean="0">
+                              <a:latin typeface="Cambria Math" panose="02040503050406030204" pitchFamily="18" charset="0"/>
+                            </a:rPr>
+                            <m:t>𝑠</m:t>
+                          </m:r>
+                        </m:e>
+                        <m:sub>
+                          <m:r>
+                            <a:rPr kumimoji="1" lang="en-US" altLang="ja-JP" b="0" i="1" smtClean="0">
+                              <a:latin typeface="Cambria Math" panose="02040503050406030204" pitchFamily="18" charset="0"/>
+                            </a:rPr>
+                            <m:t>𝑡</m:t>
+                          </m:r>
+                        </m:sub>
+                      </m:sSub>
+                    </m:oMath>
+                  </m:oMathPara>
+                </a14:m>
+                <a:endParaRPr kumimoji="1" lang="ja-JP" altLang="en-US" dirty="0"/>
+              </a:p>
+            </p:txBody>
+          </p:sp>
+        </mc:Choice>
+        <mc:Fallback xmlns="">
+          <p:sp>
+            <p:nvSpPr>
+              <p:cNvPr id="5" name="テキスト ボックス 4">
+                <a:extLst>
+                  <a:ext uri="{FF2B5EF4-FFF2-40B4-BE49-F238E27FC236}">
+                    <a16:creationId xmlns:a16="http://schemas.microsoft.com/office/drawing/2014/main" id="{562642B7-45C9-680F-2045-180A76378326}"/>
+                  </a:ext>
+                </a:extLst>
+              </p:cNvPr>
+              <p:cNvSpPr txBox="1">
+                <a:spLocks noRot="1" noChangeAspect="1" noMove="1" noResize="1" noEditPoints="1" noAdjustHandles="1" noChangeArrowheads="1" noChangeShapeType="1" noTextEdit="1"/>
+              </p:cNvSpPr>
+              <p:nvPr/>
+            </p:nvSpPr>
+            <p:spPr>
+              <a:xfrm>
+                <a:off x="1805669" y="5078187"/>
+                <a:ext cx="568778" cy="369332"/>
+              </a:xfrm>
+              <a:prstGeom prst="rect">
+                <a:avLst/>
+              </a:prstGeom>
+              <a:blipFill>
+                <a:blip r:embed="rId2"/>
+                <a:stretch>
+                  <a:fillRect/>
+                </a:stretch>
+              </a:blipFill>
+            </p:spPr>
+            <p:txBody>
+              <a:bodyPr/>
+              <a:lstStyle/>
+              <a:p>
+                <a:r>
+                  <a:rPr lang="ja-JP" altLang="en-US">
+                    <a:noFill/>
+                  </a:rPr>
+                  <a:t> </a:t>
+                </a:r>
+              </a:p>
+            </p:txBody>
+          </p:sp>
+        </mc:Fallback>
+      </mc:AlternateContent>
+      <p:sp>
+        <p:nvSpPr>
+          <p:cNvPr id="6" name="フローチャート: 結合子 5">
+            <a:extLst>
+              <a:ext uri="{FF2B5EF4-FFF2-40B4-BE49-F238E27FC236}">
+                <a16:creationId xmlns:a16="http://schemas.microsoft.com/office/drawing/2014/main" id="{8D64FBCA-5195-2C33-6B81-D935F256D8E4}"/>
+              </a:ext>
+            </a:extLst>
+          </p:cNvPr>
+          <p:cNvSpPr/>
+          <p:nvPr/>
+        </p:nvSpPr>
+        <p:spPr>
+          <a:xfrm>
+            <a:off x="3265716" y="4294414"/>
+            <a:ext cx="152399" cy="141516"/>
+          </a:xfrm>
+          <a:prstGeom prst="flowChartConnector">
+            <a:avLst/>
+          </a:prstGeom>
+          <a:solidFill>
+            <a:schemeClr val="tx1"/>
+          </a:solidFill>
+        </p:spPr>
+        <p:style>
+          <a:lnRef idx="2">
+            <a:schemeClr val="accent1">
+              <a:shade val="15000"/>
+            </a:schemeClr>
+          </a:lnRef>
+          <a:fillRef idx="1">
+            <a:schemeClr val="accent1"/>
+          </a:fillRef>
+          <a:effectRef idx="0">
+            <a:schemeClr val="accent1"/>
+          </a:effectRef>
+          <a:fontRef idx="minor">
+            <a:schemeClr val="lt1"/>
+          </a:fontRef>
+        </p:style>
+        <p:txBody>
+          <a:bodyPr rtlCol="0" anchor="ctr"/>
+          <a:lstStyle/>
+          <a:p>
+            <a:pPr algn="ctr"/>
+            <a:endParaRPr kumimoji="1" lang="ja-JP" altLang="en-US"/>
+          </a:p>
+        </p:txBody>
+      </p:sp>
+      <mc:AlternateContent xmlns:mc="http://schemas.openxmlformats.org/markup-compatibility/2006" xmlns:a14="http://schemas.microsoft.com/office/drawing/2010/main">
+        <mc:Choice Requires="a14">
+          <p:sp>
+            <p:nvSpPr>
+              <p:cNvPr id="7" name="テキスト ボックス 6">
+                <a:extLst>
+                  <a:ext uri="{FF2B5EF4-FFF2-40B4-BE49-F238E27FC236}">
+                    <a16:creationId xmlns:a16="http://schemas.microsoft.com/office/drawing/2014/main" id="{D5660C54-1A2D-5801-A5C6-354E2E86CB69}"/>
+                  </a:ext>
+                </a:extLst>
+              </p:cNvPr>
+              <p:cNvSpPr txBox="1"/>
+              <p:nvPr/>
+            </p:nvSpPr>
+            <p:spPr>
+              <a:xfrm>
+                <a:off x="3487146" y="4192610"/>
+                <a:ext cx="568778" cy="373372"/>
+              </a:xfrm>
+              <a:prstGeom prst="rect">
+                <a:avLst/>
+              </a:prstGeom>
+              <a:noFill/>
+            </p:spPr>
+            <p:txBody>
+              <a:bodyPr wrap="square" rtlCol="0">
+                <a:spAutoFit/>
+              </a:bodyPr>
+              <a:lstStyle/>
+              <a:p>
+                <a:pPr/>
+                <a14:m>
+                  <m:oMathPara xmlns:m="http://schemas.openxmlformats.org/officeDocument/2006/math">
+                    <m:oMathParaPr>
+                      <m:jc m:val="centerGroup"/>
+                    </m:oMathParaPr>
+                    <m:oMath xmlns:m="http://schemas.openxmlformats.org/officeDocument/2006/math">
+                      <m:sSubSup>
+                        <m:sSubSupPr>
+                          <m:ctrlPr>
+                            <a:rPr kumimoji="1" lang="en-US" altLang="ja-JP" b="0" i="1" smtClean="0">
+                              <a:latin typeface="Cambria Math" panose="02040503050406030204" pitchFamily="18" charset="0"/>
+                            </a:rPr>
+                          </m:ctrlPr>
+                        </m:sSubSupPr>
+                        <m:e>
+                          <m:acc>
+                            <m:accPr>
+                              <m:chr m:val="̃"/>
+                              <m:ctrlPr>
+                                <a:rPr kumimoji="1" lang="en-US" altLang="ja-JP" b="0" i="1" smtClean="0">
+                                  <a:latin typeface="Cambria Math" panose="02040503050406030204" pitchFamily="18" charset="0"/>
+                                </a:rPr>
+                              </m:ctrlPr>
+                            </m:accPr>
+                            <m:e>
+                              <m:r>
+                                <a:rPr kumimoji="1" lang="en-US" altLang="ja-JP" b="0" i="1" smtClean="0">
+                                  <a:latin typeface="Cambria Math" panose="02040503050406030204" pitchFamily="18" charset="0"/>
+                                </a:rPr>
+                                <m:t>𝑠</m:t>
+                              </m:r>
+                            </m:e>
+                          </m:acc>
+                        </m:e>
+                        <m:sub>
+                          <m:r>
+                            <a:rPr kumimoji="1" lang="en-US" altLang="ja-JP" b="0" i="1" smtClean="0">
+                              <a:latin typeface="Cambria Math" panose="02040503050406030204" pitchFamily="18" charset="0"/>
+                            </a:rPr>
+                            <m:t>𝑡</m:t>
+                          </m:r>
+                          <m:r>
+                            <a:rPr kumimoji="1" lang="en-US" altLang="ja-JP" b="0" i="1" smtClean="0">
+                              <a:latin typeface="Cambria Math" panose="02040503050406030204" pitchFamily="18" charset="0"/>
+                            </a:rPr>
+                            <m:t>+1</m:t>
+                          </m:r>
+                        </m:sub>
+                        <m:sup>
+                          <m:r>
+                            <a:rPr kumimoji="1" lang="en-US" altLang="ja-JP" b="0" i="1" smtClean="0">
+                              <a:latin typeface="Cambria Math" panose="02040503050406030204" pitchFamily="18" charset="0"/>
+                            </a:rPr>
+                            <m:t>1</m:t>
+                          </m:r>
+                        </m:sup>
+                      </m:sSubSup>
+                    </m:oMath>
+                  </m:oMathPara>
+                </a14:m>
+                <a:endParaRPr kumimoji="1" lang="ja-JP" altLang="en-US" dirty="0"/>
+              </a:p>
+            </p:txBody>
+          </p:sp>
+        </mc:Choice>
+        <mc:Fallback xmlns="">
+          <p:sp>
+            <p:nvSpPr>
+              <p:cNvPr id="7" name="テキスト ボックス 6">
+                <a:extLst>
+                  <a:ext uri="{FF2B5EF4-FFF2-40B4-BE49-F238E27FC236}">
+                    <a16:creationId xmlns:a16="http://schemas.microsoft.com/office/drawing/2014/main" id="{D5660C54-1A2D-5801-A5C6-354E2E86CB69}"/>
+                  </a:ext>
+                </a:extLst>
+              </p:cNvPr>
+              <p:cNvSpPr txBox="1">
+                <a:spLocks noRot="1" noChangeAspect="1" noMove="1" noResize="1" noEditPoints="1" noAdjustHandles="1" noChangeArrowheads="1" noChangeShapeType="1" noTextEdit="1"/>
+              </p:cNvSpPr>
+              <p:nvPr/>
+            </p:nvSpPr>
+            <p:spPr>
+              <a:xfrm>
+                <a:off x="3487146" y="4192610"/>
+                <a:ext cx="568778" cy="373372"/>
+              </a:xfrm>
+              <a:prstGeom prst="rect">
+                <a:avLst/>
+              </a:prstGeom>
+              <a:blipFill>
+                <a:blip r:embed="rId3"/>
+                <a:stretch>
+                  <a:fillRect/>
+                </a:stretch>
+              </a:blipFill>
+            </p:spPr>
+            <p:txBody>
+              <a:bodyPr/>
+              <a:lstStyle/>
+              <a:p>
+                <a:r>
+                  <a:rPr lang="ja-JP" altLang="en-US">
+                    <a:noFill/>
+                  </a:rPr>
+                  <a:t> </a:t>
+                </a:r>
+              </a:p>
+            </p:txBody>
+          </p:sp>
+        </mc:Fallback>
+      </mc:AlternateContent>
+      <p:sp>
+        <p:nvSpPr>
+          <p:cNvPr id="8" name="フローチャート: 結合子 7">
+            <a:extLst>
+              <a:ext uri="{FF2B5EF4-FFF2-40B4-BE49-F238E27FC236}">
+                <a16:creationId xmlns:a16="http://schemas.microsoft.com/office/drawing/2014/main" id="{0E4D62DC-0DD4-7F74-C6B1-106E680C0C59}"/>
+              </a:ext>
+            </a:extLst>
+          </p:cNvPr>
+          <p:cNvSpPr/>
+          <p:nvPr/>
+        </p:nvSpPr>
+        <p:spPr>
+          <a:xfrm>
+            <a:off x="3265717" y="5377541"/>
+            <a:ext cx="152399" cy="141516"/>
+          </a:xfrm>
+          <a:prstGeom prst="flowChartConnector">
+            <a:avLst/>
+          </a:prstGeom>
+          <a:solidFill>
+            <a:schemeClr val="tx1"/>
+          </a:solidFill>
+        </p:spPr>
+        <p:style>
+          <a:lnRef idx="2">
+            <a:schemeClr val="accent1">
+              <a:shade val="15000"/>
+            </a:schemeClr>
+          </a:lnRef>
+          <a:fillRef idx="1">
+            <a:schemeClr val="accent1"/>
+          </a:fillRef>
+          <a:effectRef idx="0">
+            <a:schemeClr val="accent1"/>
+          </a:effectRef>
+          <a:fontRef idx="minor">
+            <a:schemeClr val="lt1"/>
+          </a:fontRef>
+        </p:style>
+        <p:txBody>
+          <a:bodyPr rtlCol="0" anchor="ctr"/>
+          <a:lstStyle/>
+          <a:p>
+            <a:pPr algn="ctr"/>
+            <a:endParaRPr kumimoji="1" lang="ja-JP" altLang="en-US"/>
+          </a:p>
+        </p:txBody>
+      </p:sp>
+      <mc:AlternateContent xmlns:mc="http://schemas.openxmlformats.org/markup-compatibility/2006" xmlns:a14="http://schemas.microsoft.com/office/drawing/2010/main">
+        <mc:Choice Requires="a14">
+          <p:sp>
+            <p:nvSpPr>
+              <p:cNvPr id="9" name="テキスト ボックス 8">
+                <a:extLst>
+                  <a:ext uri="{FF2B5EF4-FFF2-40B4-BE49-F238E27FC236}">
+                    <a16:creationId xmlns:a16="http://schemas.microsoft.com/office/drawing/2014/main" id="{D48C05BD-27F2-FCD0-CFCC-431DB0362D91}"/>
+                  </a:ext>
+                </a:extLst>
+              </p:cNvPr>
+              <p:cNvSpPr txBox="1"/>
+              <p:nvPr/>
+            </p:nvSpPr>
+            <p:spPr>
+              <a:xfrm>
+                <a:off x="3487146" y="5262853"/>
+                <a:ext cx="568778" cy="373949"/>
+              </a:xfrm>
+              <a:prstGeom prst="rect">
+                <a:avLst/>
+              </a:prstGeom>
+              <a:noFill/>
+            </p:spPr>
+            <p:txBody>
+              <a:bodyPr wrap="square" rtlCol="0">
+                <a:spAutoFit/>
+              </a:bodyPr>
+              <a:lstStyle/>
+              <a:p>
+                <a:pPr/>
+                <a14:m>
+                  <m:oMathPara xmlns:m="http://schemas.openxmlformats.org/officeDocument/2006/math">
+                    <m:oMathParaPr>
+                      <m:jc m:val="centerGroup"/>
+                    </m:oMathParaPr>
+                    <m:oMath xmlns:m="http://schemas.openxmlformats.org/officeDocument/2006/math">
+                      <m:sSubSup>
+                        <m:sSubSupPr>
+                          <m:ctrlPr>
+                            <a:rPr kumimoji="1" lang="en-US" altLang="ja-JP" b="0" i="1" smtClean="0">
+                              <a:latin typeface="Cambria Math" panose="02040503050406030204" pitchFamily="18" charset="0"/>
+                            </a:rPr>
+                          </m:ctrlPr>
+                        </m:sSubSupPr>
+                        <m:e>
+                          <m:acc>
+                            <m:accPr>
+                              <m:chr m:val="̃"/>
+                              <m:ctrlPr>
+                                <a:rPr kumimoji="1" lang="en-US" altLang="ja-JP" b="0" i="1" smtClean="0">
+                                  <a:latin typeface="Cambria Math" panose="02040503050406030204" pitchFamily="18" charset="0"/>
+                                </a:rPr>
+                              </m:ctrlPr>
+                            </m:accPr>
+                            <m:e>
+                              <m:r>
+                                <a:rPr kumimoji="1" lang="en-US" altLang="ja-JP" b="0" i="1" smtClean="0">
+                                  <a:latin typeface="Cambria Math" panose="02040503050406030204" pitchFamily="18" charset="0"/>
+                                </a:rPr>
+                                <m:t>𝑠</m:t>
+                              </m:r>
+                            </m:e>
+                          </m:acc>
+                        </m:e>
+                        <m:sub>
+                          <m:r>
+                            <a:rPr kumimoji="1" lang="en-US" altLang="ja-JP" b="0" i="1" smtClean="0">
+                              <a:latin typeface="Cambria Math" panose="02040503050406030204" pitchFamily="18" charset="0"/>
+                            </a:rPr>
+                            <m:t>𝑡</m:t>
+                          </m:r>
+                          <m:r>
+                            <a:rPr kumimoji="1" lang="en-US" altLang="ja-JP" b="0" i="1" smtClean="0">
+                              <a:latin typeface="Cambria Math" panose="02040503050406030204" pitchFamily="18" charset="0"/>
+                            </a:rPr>
+                            <m:t>+1</m:t>
+                          </m:r>
+                        </m:sub>
+                        <m:sup>
+                          <m:r>
+                            <a:rPr kumimoji="1" lang="en-US" altLang="ja-JP" b="0" i="1" smtClean="0">
+                              <a:latin typeface="Cambria Math" panose="02040503050406030204" pitchFamily="18" charset="0"/>
+                            </a:rPr>
+                            <m:t>2</m:t>
+                          </m:r>
+                        </m:sup>
+                      </m:sSubSup>
+                    </m:oMath>
+                  </m:oMathPara>
+                </a14:m>
+                <a:endParaRPr kumimoji="1" lang="ja-JP" altLang="en-US" dirty="0"/>
+              </a:p>
+            </p:txBody>
+          </p:sp>
+        </mc:Choice>
+        <mc:Fallback xmlns="">
+          <p:sp>
+            <p:nvSpPr>
+              <p:cNvPr id="9" name="テキスト ボックス 8">
+                <a:extLst>
+                  <a:ext uri="{FF2B5EF4-FFF2-40B4-BE49-F238E27FC236}">
+                    <a16:creationId xmlns:a16="http://schemas.microsoft.com/office/drawing/2014/main" id="{D48C05BD-27F2-FCD0-CFCC-431DB0362D91}"/>
+                  </a:ext>
+                </a:extLst>
+              </p:cNvPr>
+              <p:cNvSpPr txBox="1">
+                <a:spLocks noRot="1" noChangeAspect="1" noMove="1" noResize="1" noEditPoints="1" noAdjustHandles="1" noChangeArrowheads="1" noChangeShapeType="1" noTextEdit="1"/>
+              </p:cNvSpPr>
+              <p:nvPr/>
+            </p:nvSpPr>
+            <p:spPr>
+              <a:xfrm>
+                <a:off x="3487146" y="5262853"/>
+                <a:ext cx="568778" cy="373949"/>
+              </a:xfrm>
+              <a:prstGeom prst="rect">
+                <a:avLst/>
+              </a:prstGeom>
+              <a:blipFill>
+                <a:blip r:embed="rId4"/>
+                <a:stretch>
+                  <a:fillRect/>
+                </a:stretch>
+              </a:blipFill>
+            </p:spPr>
+            <p:txBody>
+              <a:bodyPr/>
+              <a:lstStyle/>
+              <a:p>
+                <a:r>
+                  <a:rPr lang="ja-JP" altLang="en-US">
+                    <a:noFill/>
+                  </a:rPr>
+                  <a:t> </a:t>
+                </a:r>
+              </a:p>
+            </p:txBody>
+          </p:sp>
+        </mc:Fallback>
+      </mc:AlternateContent>
+      <p:sp>
+        <p:nvSpPr>
+          <p:cNvPr id="12" name="矢印: 右 11">
+            <a:extLst>
+              <a:ext uri="{FF2B5EF4-FFF2-40B4-BE49-F238E27FC236}">
+                <a16:creationId xmlns:a16="http://schemas.microsoft.com/office/drawing/2014/main" id="{A5C76A2E-B49B-AE9E-154E-98F5B77FCF3A}"/>
+              </a:ext>
+            </a:extLst>
+          </p:cNvPr>
+          <p:cNvSpPr/>
+          <p:nvPr/>
+        </p:nvSpPr>
+        <p:spPr>
+          <a:xfrm rot="19836887">
+            <a:off x="2333403" y="4604141"/>
+            <a:ext cx="740229" cy="128445"/>
+          </a:xfrm>
+          <a:prstGeom prst="rightArrow">
+            <a:avLst/>
+          </a:prstGeom>
+          <a:solidFill>
+            <a:schemeClr val="accent5">
+              <a:lumMod val="75000"/>
+            </a:schemeClr>
+          </a:solidFill>
+        </p:spPr>
+        <p:style>
+          <a:lnRef idx="2">
+            <a:schemeClr val="accent1">
+              <a:shade val="15000"/>
+            </a:schemeClr>
+          </a:lnRef>
+          <a:fillRef idx="1">
+            <a:schemeClr val="accent1"/>
+          </a:fillRef>
+          <a:effectRef idx="0">
+            <a:schemeClr val="accent1"/>
+          </a:effectRef>
+          <a:fontRef idx="minor">
+            <a:schemeClr val="lt1"/>
+          </a:fontRef>
+        </p:style>
+        <p:txBody>
+          <a:bodyPr rtlCol="0" anchor="ctr"/>
+          <a:lstStyle/>
+          <a:p>
+            <a:pPr algn="ctr"/>
+            <a:endParaRPr kumimoji="1" lang="ja-JP" altLang="en-US"/>
+          </a:p>
+        </p:txBody>
+      </p:sp>
+      <p:sp>
+        <p:nvSpPr>
+          <p:cNvPr id="13" name="矢印: 右 12">
+            <a:extLst>
+              <a:ext uri="{FF2B5EF4-FFF2-40B4-BE49-F238E27FC236}">
+                <a16:creationId xmlns:a16="http://schemas.microsoft.com/office/drawing/2014/main" id="{E1A51DF5-5EFB-7DD4-80D9-8A2A567EBF2F}"/>
+              </a:ext>
+            </a:extLst>
+          </p:cNvPr>
+          <p:cNvSpPr/>
+          <p:nvPr/>
+        </p:nvSpPr>
+        <p:spPr>
+          <a:xfrm rot="1118072">
+            <a:off x="2350626" y="5204178"/>
+            <a:ext cx="740229" cy="128445"/>
+          </a:xfrm>
+          <a:prstGeom prst="rightArrow">
+            <a:avLst/>
+          </a:prstGeom>
+          <a:solidFill>
+            <a:schemeClr val="accent5">
+              <a:lumMod val="75000"/>
+            </a:schemeClr>
+          </a:solidFill>
+        </p:spPr>
+        <p:style>
+          <a:lnRef idx="2">
+            <a:schemeClr val="accent1">
+              <a:shade val="15000"/>
+            </a:schemeClr>
+          </a:lnRef>
+          <a:fillRef idx="1">
+            <a:schemeClr val="accent1"/>
+          </a:fillRef>
+          <a:effectRef idx="0">
+            <a:schemeClr val="accent1"/>
+          </a:effectRef>
+          <a:fontRef idx="minor">
+            <a:schemeClr val="lt1"/>
+          </a:fontRef>
+        </p:style>
+        <p:txBody>
+          <a:bodyPr rtlCol="0" anchor="ctr"/>
+          <a:lstStyle/>
+          <a:p>
+            <a:pPr algn="ctr"/>
+            <a:endParaRPr kumimoji="1" lang="ja-JP" altLang="en-US"/>
+          </a:p>
+        </p:txBody>
+      </p:sp>
+      <p:sp>
+        <p:nvSpPr>
+          <p:cNvPr id="14" name="フローチャート: 結合子 13">
+            <a:extLst>
+              <a:ext uri="{FF2B5EF4-FFF2-40B4-BE49-F238E27FC236}">
+                <a16:creationId xmlns:a16="http://schemas.microsoft.com/office/drawing/2014/main" id="{B3A9F016-B2B6-80E3-97D9-12CADC36A5AC}"/>
+              </a:ext>
+            </a:extLst>
+          </p:cNvPr>
+          <p:cNvSpPr/>
+          <p:nvPr/>
+        </p:nvSpPr>
+        <p:spPr>
+          <a:xfrm>
+            <a:off x="5840186" y="4121852"/>
+            <a:ext cx="152399" cy="141516"/>
+          </a:xfrm>
+          <a:prstGeom prst="flowChartConnector">
+            <a:avLst/>
+          </a:prstGeom>
+          <a:solidFill>
+            <a:schemeClr val="tx1"/>
+          </a:solidFill>
+        </p:spPr>
+        <p:style>
+          <a:lnRef idx="2">
+            <a:schemeClr val="accent1">
+              <a:shade val="15000"/>
+            </a:schemeClr>
+          </a:lnRef>
+          <a:fillRef idx="1">
+            <a:schemeClr val="accent1"/>
+          </a:fillRef>
+          <a:effectRef idx="0">
+            <a:schemeClr val="accent1"/>
+          </a:effectRef>
+          <a:fontRef idx="minor">
+            <a:schemeClr val="lt1"/>
+          </a:fontRef>
+        </p:style>
+        <p:txBody>
+          <a:bodyPr rtlCol="0" anchor="ctr"/>
+          <a:lstStyle/>
+          <a:p>
+            <a:pPr algn="ctr"/>
+            <a:endParaRPr kumimoji="1" lang="ja-JP" altLang="en-US"/>
+          </a:p>
+        </p:txBody>
+      </p:sp>
+      <p:sp>
+        <p:nvSpPr>
+          <p:cNvPr id="16" name="フローチャート: 結合子 15">
+            <a:extLst>
+              <a:ext uri="{FF2B5EF4-FFF2-40B4-BE49-F238E27FC236}">
+                <a16:creationId xmlns:a16="http://schemas.microsoft.com/office/drawing/2014/main" id="{B64A922A-1D91-E8B2-0227-8E7605A235B5}"/>
+              </a:ext>
+            </a:extLst>
+          </p:cNvPr>
+          <p:cNvSpPr/>
+          <p:nvPr/>
+        </p:nvSpPr>
+        <p:spPr>
+          <a:xfrm>
+            <a:off x="7092044" y="3479595"/>
+            <a:ext cx="152399" cy="141516"/>
+          </a:xfrm>
+          <a:prstGeom prst="flowChartConnector">
+            <a:avLst/>
+          </a:prstGeom>
+          <a:solidFill>
+            <a:schemeClr val="tx1"/>
+          </a:solidFill>
+        </p:spPr>
+        <p:style>
+          <a:lnRef idx="2">
+            <a:schemeClr val="accent1">
+              <a:shade val="15000"/>
+            </a:schemeClr>
+          </a:lnRef>
+          <a:fillRef idx="1">
+            <a:schemeClr val="accent1"/>
+          </a:fillRef>
+          <a:effectRef idx="0">
+            <a:schemeClr val="accent1"/>
+          </a:effectRef>
+          <a:fontRef idx="minor">
+            <a:schemeClr val="lt1"/>
+          </a:fontRef>
+        </p:style>
+        <p:txBody>
+          <a:bodyPr rtlCol="0" anchor="ctr"/>
+          <a:lstStyle/>
+          <a:p>
+            <a:pPr algn="ctr"/>
+            <a:endParaRPr kumimoji="1" lang="ja-JP" altLang="en-US"/>
+          </a:p>
+        </p:txBody>
+      </p:sp>
+      <mc:AlternateContent xmlns:mc="http://schemas.openxmlformats.org/markup-compatibility/2006" xmlns:a14="http://schemas.microsoft.com/office/drawing/2010/main">
+        <mc:Choice Requires="a14">
+          <p:sp>
+            <p:nvSpPr>
+              <p:cNvPr id="17" name="テキスト ボックス 16">
+                <a:extLst>
+                  <a:ext uri="{FF2B5EF4-FFF2-40B4-BE49-F238E27FC236}">
+                    <a16:creationId xmlns:a16="http://schemas.microsoft.com/office/drawing/2014/main" id="{D8645DB0-17D6-B986-86EF-32A531859267}"/>
+                  </a:ext>
+                </a:extLst>
+              </p:cNvPr>
+              <p:cNvSpPr txBox="1"/>
+              <p:nvPr/>
+            </p:nvSpPr>
+            <p:spPr>
+              <a:xfrm>
+                <a:off x="7384602" y="3316977"/>
+                <a:ext cx="568778" cy="405367"/>
+              </a:xfrm>
+              <a:prstGeom prst="rect">
+                <a:avLst/>
+              </a:prstGeom>
+              <a:noFill/>
+            </p:spPr>
+            <p:txBody>
+              <a:bodyPr wrap="square" rtlCol="0">
+                <a:spAutoFit/>
+              </a:bodyPr>
+              <a:lstStyle/>
+              <a:p>
+                <a:pPr/>
+                <a14:m>
+                  <m:oMathPara xmlns:m="http://schemas.openxmlformats.org/officeDocument/2006/math">
+                    <m:oMathParaPr>
+                      <m:jc m:val="centerGroup"/>
+                    </m:oMathParaPr>
+                    <m:oMath xmlns:m="http://schemas.openxmlformats.org/officeDocument/2006/math">
+                      <m:sSubSup>
+                        <m:sSubSupPr>
+                          <m:ctrlPr>
+                            <a:rPr kumimoji="1" lang="en-US" altLang="ja-JP" b="0" i="1" smtClean="0">
+                              <a:latin typeface="Cambria Math" panose="02040503050406030204" pitchFamily="18" charset="0"/>
+                            </a:rPr>
+                          </m:ctrlPr>
+                        </m:sSubSupPr>
+                        <m:e>
+                          <m:acc>
+                            <m:accPr>
+                              <m:chr m:val="̃"/>
+                              <m:ctrlPr>
+                                <a:rPr kumimoji="1" lang="en-US" altLang="ja-JP" b="0" i="1" smtClean="0">
+                                  <a:latin typeface="Cambria Math" panose="02040503050406030204" pitchFamily="18" charset="0"/>
+                                </a:rPr>
+                              </m:ctrlPr>
+                            </m:accPr>
+                            <m:e>
+                              <m:r>
+                                <a:rPr kumimoji="1" lang="en-US" altLang="ja-JP" b="0" i="1" smtClean="0">
+                                  <a:latin typeface="Cambria Math" panose="02040503050406030204" pitchFamily="18" charset="0"/>
+                                </a:rPr>
+                                <m:t>𝑠</m:t>
+                              </m:r>
+                            </m:e>
+                          </m:acc>
+                        </m:e>
+                        <m:sub>
+                          <m:r>
+                            <a:rPr kumimoji="1" lang="en-US" altLang="ja-JP" b="0" i="1" smtClean="0">
+                              <a:latin typeface="Cambria Math" panose="02040503050406030204" pitchFamily="18" charset="0"/>
+                            </a:rPr>
+                            <m:t>𝑡</m:t>
+                          </m:r>
+                          <m:r>
+                            <a:rPr kumimoji="1" lang="en-US" altLang="ja-JP" b="0" i="1" smtClean="0">
+                              <a:latin typeface="Cambria Math" panose="02040503050406030204" pitchFamily="18" charset="0"/>
+                            </a:rPr>
+                            <m:t>+2</m:t>
+                          </m:r>
+                        </m:sub>
+                        <m:sup>
+                          <m:r>
+                            <a:rPr kumimoji="1" lang="en-US" altLang="ja-JP" b="0" i="1" smtClean="0">
+                              <a:latin typeface="Cambria Math" panose="02040503050406030204" pitchFamily="18" charset="0"/>
+                            </a:rPr>
+                            <m:t>1,1</m:t>
+                          </m:r>
+                        </m:sup>
+                      </m:sSubSup>
+                    </m:oMath>
+                  </m:oMathPara>
+                </a14:m>
+                <a:endParaRPr kumimoji="1" lang="ja-JP" altLang="en-US" dirty="0"/>
+              </a:p>
+            </p:txBody>
+          </p:sp>
+        </mc:Choice>
+        <mc:Fallback xmlns="">
+          <p:sp>
+            <p:nvSpPr>
+              <p:cNvPr id="17" name="テキスト ボックス 16">
+                <a:extLst>
+                  <a:ext uri="{FF2B5EF4-FFF2-40B4-BE49-F238E27FC236}">
+                    <a16:creationId xmlns:a16="http://schemas.microsoft.com/office/drawing/2014/main" id="{D8645DB0-17D6-B986-86EF-32A531859267}"/>
+                  </a:ext>
+                </a:extLst>
+              </p:cNvPr>
+              <p:cNvSpPr txBox="1">
+                <a:spLocks noRot="1" noChangeAspect="1" noMove="1" noResize="1" noEditPoints="1" noAdjustHandles="1" noChangeArrowheads="1" noChangeShapeType="1" noTextEdit="1"/>
+              </p:cNvSpPr>
+              <p:nvPr/>
+            </p:nvSpPr>
+            <p:spPr>
+              <a:xfrm>
+                <a:off x="7384602" y="3316977"/>
+                <a:ext cx="568778" cy="405367"/>
+              </a:xfrm>
+              <a:prstGeom prst="rect">
+                <a:avLst/>
+              </a:prstGeom>
+              <a:blipFill>
+                <a:blip r:embed="rId5"/>
+                <a:stretch>
+                  <a:fillRect b="-1493"/>
+                </a:stretch>
+              </a:blipFill>
+            </p:spPr>
+            <p:txBody>
+              <a:bodyPr/>
+              <a:lstStyle/>
+              <a:p>
+                <a:r>
+                  <a:rPr lang="ja-JP" altLang="en-US">
+                    <a:noFill/>
+                  </a:rPr>
+                  <a:t> </a:t>
+                </a:r>
+              </a:p>
+            </p:txBody>
+          </p:sp>
+        </mc:Fallback>
+      </mc:AlternateContent>
+      <p:sp>
+        <p:nvSpPr>
+          <p:cNvPr id="18" name="フローチャート: 結合子 17">
+            <a:extLst>
+              <a:ext uri="{FF2B5EF4-FFF2-40B4-BE49-F238E27FC236}">
+                <a16:creationId xmlns:a16="http://schemas.microsoft.com/office/drawing/2014/main" id="{B122987F-806C-6384-F698-D12EE920188E}"/>
+              </a:ext>
+            </a:extLst>
+          </p:cNvPr>
+          <p:cNvSpPr/>
+          <p:nvPr/>
+        </p:nvSpPr>
+        <p:spPr>
+          <a:xfrm>
+            <a:off x="7092045" y="4562722"/>
+            <a:ext cx="152399" cy="141516"/>
+          </a:xfrm>
+          <a:prstGeom prst="flowChartConnector">
+            <a:avLst/>
+          </a:prstGeom>
+          <a:solidFill>
+            <a:schemeClr val="tx1"/>
+          </a:solidFill>
+        </p:spPr>
+        <p:style>
+          <a:lnRef idx="2">
+            <a:schemeClr val="accent1">
+              <a:shade val="15000"/>
+            </a:schemeClr>
+          </a:lnRef>
+          <a:fillRef idx="1">
+            <a:schemeClr val="accent1"/>
+          </a:fillRef>
+          <a:effectRef idx="0">
+            <a:schemeClr val="accent1"/>
+          </a:effectRef>
+          <a:fontRef idx="minor">
+            <a:schemeClr val="lt1"/>
+          </a:fontRef>
+        </p:style>
+        <p:txBody>
+          <a:bodyPr rtlCol="0" anchor="ctr"/>
+          <a:lstStyle/>
+          <a:p>
+            <a:pPr algn="ctr"/>
+            <a:endParaRPr kumimoji="1" lang="ja-JP" altLang="en-US"/>
+          </a:p>
+        </p:txBody>
+      </p:sp>
+      <mc:AlternateContent xmlns:mc="http://schemas.openxmlformats.org/markup-compatibility/2006" xmlns:a14="http://schemas.microsoft.com/office/drawing/2010/main">
+        <mc:Choice Requires="a14">
+          <p:sp>
+            <p:nvSpPr>
+              <p:cNvPr id="19" name="テキスト ボックス 18">
+                <a:extLst>
+                  <a:ext uri="{FF2B5EF4-FFF2-40B4-BE49-F238E27FC236}">
+                    <a16:creationId xmlns:a16="http://schemas.microsoft.com/office/drawing/2014/main" id="{6ED7D390-BFDB-14CF-7E11-6148ADA7613B}"/>
+                  </a:ext>
+                </a:extLst>
+              </p:cNvPr>
+              <p:cNvSpPr txBox="1"/>
+              <p:nvPr/>
+            </p:nvSpPr>
+            <p:spPr>
+              <a:xfrm>
+                <a:off x="7384602" y="4432099"/>
+                <a:ext cx="568778" cy="405945"/>
+              </a:xfrm>
+              <a:prstGeom prst="rect">
+                <a:avLst/>
+              </a:prstGeom>
+              <a:noFill/>
+            </p:spPr>
+            <p:txBody>
+              <a:bodyPr wrap="square" rtlCol="0">
+                <a:spAutoFit/>
+              </a:bodyPr>
+              <a:lstStyle/>
+              <a:p>
+                <a:pPr/>
+                <a14:m>
+                  <m:oMathPara xmlns:m="http://schemas.openxmlformats.org/officeDocument/2006/math">
+                    <m:oMathParaPr>
+                      <m:jc m:val="centerGroup"/>
+                    </m:oMathParaPr>
+                    <m:oMath xmlns:m="http://schemas.openxmlformats.org/officeDocument/2006/math">
+                      <m:sSubSup>
+                        <m:sSubSupPr>
+                          <m:ctrlPr>
+                            <a:rPr kumimoji="1" lang="en-US" altLang="ja-JP" b="0" i="1" smtClean="0">
+                              <a:latin typeface="Cambria Math" panose="02040503050406030204" pitchFamily="18" charset="0"/>
+                            </a:rPr>
+                          </m:ctrlPr>
+                        </m:sSubSupPr>
+                        <m:e>
+                          <m:acc>
+                            <m:accPr>
+                              <m:chr m:val="̃"/>
+                              <m:ctrlPr>
+                                <a:rPr kumimoji="1" lang="en-US" altLang="ja-JP" b="0" i="1" smtClean="0">
+                                  <a:latin typeface="Cambria Math" panose="02040503050406030204" pitchFamily="18" charset="0"/>
+                                </a:rPr>
+                              </m:ctrlPr>
+                            </m:accPr>
+                            <m:e>
+                              <m:r>
+                                <a:rPr kumimoji="1" lang="en-US" altLang="ja-JP" b="0" i="1" smtClean="0">
+                                  <a:latin typeface="Cambria Math" panose="02040503050406030204" pitchFamily="18" charset="0"/>
+                                </a:rPr>
+                                <m:t>𝑠</m:t>
+                              </m:r>
+                            </m:e>
+                          </m:acc>
+                        </m:e>
+                        <m:sub>
+                          <m:r>
+                            <a:rPr kumimoji="1" lang="en-US" altLang="ja-JP" b="0" i="1" smtClean="0">
+                              <a:latin typeface="Cambria Math" panose="02040503050406030204" pitchFamily="18" charset="0"/>
+                            </a:rPr>
+                            <m:t>𝑡</m:t>
+                          </m:r>
+                          <m:r>
+                            <a:rPr kumimoji="1" lang="en-US" altLang="ja-JP" b="0" i="1" smtClean="0">
+                              <a:latin typeface="Cambria Math" panose="02040503050406030204" pitchFamily="18" charset="0"/>
+                            </a:rPr>
+                            <m:t>+2</m:t>
+                          </m:r>
+                        </m:sub>
+                        <m:sup>
+                          <m:r>
+                            <a:rPr kumimoji="1" lang="en-US" altLang="ja-JP" b="0" i="1" smtClean="0">
+                              <a:latin typeface="Cambria Math" panose="02040503050406030204" pitchFamily="18" charset="0"/>
+                            </a:rPr>
+                            <m:t>1,2</m:t>
+                          </m:r>
+                        </m:sup>
+                      </m:sSubSup>
+                    </m:oMath>
+                  </m:oMathPara>
+                </a14:m>
+                <a:endParaRPr kumimoji="1" lang="ja-JP" altLang="en-US" dirty="0"/>
+              </a:p>
+            </p:txBody>
+          </p:sp>
+        </mc:Choice>
+        <mc:Fallback xmlns="">
+          <p:sp>
+            <p:nvSpPr>
+              <p:cNvPr id="19" name="テキスト ボックス 18">
+                <a:extLst>
+                  <a:ext uri="{FF2B5EF4-FFF2-40B4-BE49-F238E27FC236}">
+                    <a16:creationId xmlns:a16="http://schemas.microsoft.com/office/drawing/2014/main" id="{6ED7D390-BFDB-14CF-7E11-6148ADA7613B}"/>
+                  </a:ext>
+                </a:extLst>
+              </p:cNvPr>
+              <p:cNvSpPr txBox="1">
+                <a:spLocks noRot="1" noChangeAspect="1" noMove="1" noResize="1" noEditPoints="1" noAdjustHandles="1" noChangeArrowheads="1" noChangeShapeType="1" noTextEdit="1"/>
+              </p:cNvSpPr>
+              <p:nvPr/>
+            </p:nvSpPr>
+            <p:spPr>
+              <a:xfrm>
+                <a:off x="7384602" y="4432099"/>
+                <a:ext cx="568778" cy="405945"/>
+              </a:xfrm>
+              <a:prstGeom prst="rect">
+                <a:avLst/>
+              </a:prstGeom>
+              <a:blipFill>
+                <a:blip r:embed="rId6"/>
+                <a:stretch>
+                  <a:fillRect b="-1493"/>
+                </a:stretch>
+              </a:blipFill>
+            </p:spPr>
+            <p:txBody>
+              <a:bodyPr/>
+              <a:lstStyle/>
+              <a:p>
+                <a:r>
+                  <a:rPr lang="ja-JP" altLang="en-US">
+                    <a:noFill/>
+                  </a:rPr>
+                  <a:t> </a:t>
+                </a:r>
+              </a:p>
+            </p:txBody>
+          </p:sp>
+        </mc:Fallback>
+      </mc:AlternateContent>
+      <p:sp>
+        <p:nvSpPr>
+          <p:cNvPr id="20" name="矢印: 右 19">
+            <a:extLst>
+              <a:ext uri="{FF2B5EF4-FFF2-40B4-BE49-F238E27FC236}">
+                <a16:creationId xmlns:a16="http://schemas.microsoft.com/office/drawing/2014/main" id="{A4E03B33-9813-1634-402B-0E2E6DB68D78}"/>
+              </a:ext>
+            </a:extLst>
+          </p:cNvPr>
+          <p:cNvSpPr/>
+          <p:nvPr/>
+        </p:nvSpPr>
+        <p:spPr>
+          <a:xfrm rot="19836887">
+            <a:off x="6159731" y="3789322"/>
+            <a:ext cx="740229" cy="128445"/>
+          </a:xfrm>
+          <a:prstGeom prst="rightArrow">
+            <a:avLst/>
+          </a:prstGeom>
+          <a:solidFill>
+            <a:schemeClr val="accent5">
+              <a:lumMod val="75000"/>
+            </a:schemeClr>
+          </a:solidFill>
+        </p:spPr>
+        <p:style>
+          <a:lnRef idx="2">
+            <a:schemeClr val="accent1">
+              <a:shade val="15000"/>
+            </a:schemeClr>
+          </a:lnRef>
+          <a:fillRef idx="1">
+            <a:schemeClr val="accent1"/>
+          </a:fillRef>
+          <a:effectRef idx="0">
+            <a:schemeClr val="accent1"/>
+          </a:effectRef>
+          <a:fontRef idx="minor">
+            <a:schemeClr val="lt1"/>
+          </a:fontRef>
+        </p:style>
+        <p:txBody>
+          <a:bodyPr rtlCol="0" anchor="ctr"/>
+          <a:lstStyle/>
+          <a:p>
+            <a:pPr algn="ctr"/>
+            <a:endParaRPr kumimoji="1" lang="ja-JP" altLang="en-US"/>
+          </a:p>
+        </p:txBody>
+      </p:sp>
+      <p:sp>
+        <p:nvSpPr>
+          <p:cNvPr id="21" name="矢印: 右 20">
+            <a:extLst>
+              <a:ext uri="{FF2B5EF4-FFF2-40B4-BE49-F238E27FC236}">
+                <a16:creationId xmlns:a16="http://schemas.microsoft.com/office/drawing/2014/main" id="{D1FA6401-B764-8915-5E49-73CC2DFC066A}"/>
+              </a:ext>
+            </a:extLst>
+          </p:cNvPr>
+          <p:cNvSpPr/>
+          <p:nvPr/>
+        </p:nvSpPr>
+        <p:spPr>
+          <a:xfrm rot="1118072">
+            <a:off x="6176954" y="4389359"/>
+            <a:ext cx="740229" cy="128445"/>
+          </a:xfrm>
+          <a:prstGeom prst="rightArrow">
+            <a:avLst/>
+          </a:prstGeom>
+          <a:solidFill>
+            <a:schemeClr val="accent5">
+              <a:lumMod val="75000"/>
+            </a:schemeClr>
+          </a:solidFill>
+        </p:spPr>
+        <p:style>
+          <a:lnRef idx="2">
+            <a:schemeClr val="accent1">
+              <a:shade val="15000"/>
+            </a:schemeClr>
+          </a:lnRef>
+          <a:fillRef idx="1">
+            <a:schemeClr val="accent1"/>
+          </a:fillRef>
+          <a:effectRef idx="0">
+            <a:schemeClr val="accent1"/>
+          </a:effectRef>
+          <a:fontRef idx="minor">
+            <a:schemeClr val="lt1"/>
+          </a:fontRef>
+        </p:style>
+        <p:txBody>
+          <a:bodyPr rtlCol="0" anchor="ctr"/>
+          <a:lstStyle/>
+          <a:p>
+            <a:pPr algn="ctr"/>
+            <a:endParaRPr kumimoji="1" lang="ja-JP" altLang="en-US"/>
+          </a:p>
+        </p:txBody>
+      </p:sp>
+      <p:sp>
+        <p:nvSpPr>
+          <p:cNvPr id="22" name="フローチャート: 結合子 21">
+            <a:extLst>
+              <a:ext uri="{FF2B5EF4-FFF2-40B4-BE49-F238E27FC236}">
+                <a16:creationId xmlns:a16="http://schemas.microsoft.com/office/drawing/2014/main" id="{024A73EB-D625-B5D5-22A3-6B546086DA23}"/>
+              </a:ext>
+            </a:extLst>
+          </p:cNvPr>
+          <p:cNvSpPr/>
+          <p:nvPr/>
+        </p:nvSpPr>
+        <p:spPr>
+          <a:xfrm>
+            <a:off x="5840186" y="5720444"/>
+            <a:ext cx="152399" cy="141516"/>
+          </a:xfrm>
+          <a:prstGeom prst="flowChartConnector">
+            <a:avLst/>
+          </a:prstGeom>
+          <a:solidFill>
+            <a:schemeClr val="tx1"/>
+          </a:solidFill>
+        </p:spPr>
+        <p:style>
+          <a:lnRef idx="2">
+            <a:schemeClr val="accent1">
+              <a:shade val="15000"/>
+            </a:schemeClr>
+          </a:lnRef>
+          <a:fillRef idx="1">
+            <a:schemeClr val="accent1"/>
+          </a:fillRef>
+          <a:effectRef idx="0">
+            <a:schemeClr val="accent1"/>
+          </a:effectRef>
+          <a:fontRef idx="minor">
+            <a:schemeClr val="lt1"/>
+          </a:fontRef>
+        </p:style>
+        <p:txBody>
+          <a:bodyPr rtlCol="0" anchor="ctr"/>
+          <a:lstStyle/>
+          <a:p>
+            <a:pPr algn="ctr"/>
+            <a:endParaRPr kumimoji="1" lang="ja-JP" altLang="en-US"/>
+          </a:p>
+        </p:txBody>
+      </p:sp>
+      <p:sp>
+        <p:nvSpPr>
+          <p:cNvPr id="24" name="フローチャート: 結合子 23">
+            <a:extLst>
+              <a:ext uri="{FF2B5EF4-FFF2-40B4-BE49-F238E27FC236}">
+                <a16:creationId xmlns:a16="http://schemas.microsoft.com/office/drawing/2014/main" id="{D9720C44-A660-3720-A59A-F5A0463B75C0}"/>
+              </a:ext>
+            </a:extLst>
+          </p:cNvPr>
+          <p:cNvSpPr/>
+          <p:nvPr/>
+        </p:nvSpPr>
+        <p:spPr>
+          <a:xfrm>
+            <a:off x="7092044" y="5078187"/>
+            <a:ext cx="152399" cy="141516"/>
+          </a:xfrm>
+          <a:prstGeom prst="flowChartConnector">
+            <a:avLst/>
+          </a:prstGeom>
+          <a:solidFill>
+            <a:schemeClr val="tx1"/>
+          </a:solidFill>
+        </p:spPr>
+        <p:style>
+          <a:lnRef idx="2">
+            <a:schemeClr val="accent1">
+              <a:shade val="15000"/>
+            </a:schemeClr>
+          </a:lnRef>
+          <a:fillRef idx="1">
+            <a:schemeClr val="accent1"/>
+          </a:fillRef>
+          <a:effectRef idx="0">
+            <a:schemeClr val="accent1"/>
+          </a:effectRef>
+          <a:fontRef idx="minor">
+            <a:schemeClr val="lt1"/>
+          </a:fontRef>
+        </p:style>
+        <p:txBody>
+          <a:bodyPr rtlCol="0" anchor="ctr"/>
+          <a:lstStyle/>
+          <a:p>
+            <a:pPr algn="ctr"/>
+            <a:endParaRPr kumimoji="1" lang="ja-JP" altLang="en-US"/>
+          </a:p>
+        </p:txBody>
+      </p:sp>
+      <p:sp>
+        <p:nvSpPr>
+          <p:cNvPr id="26" name="フローチャート: 結合子 25">
+            <a:extLst>
+              <a:ext uri="{FF2B5EF4-FFF2-40B4-BE49-F238E27FC236}">
+                <a16:creationId xmlns:a16="http://schemas.microsoft.com/office/drawing/2014/main" id="{D1790113-E0FF-8B96-7AE5-EA4E4382A3E2}"/>
+              </a:ext>
+            </a:extLst>
+          </p:cNvPr>
+          <p:cNvSpPr/>
+          <p:nvPr/>
+        </p:nvSpPr>
+        <p:spPr>
+          <a:xfrm>
+            <a:off x="7092045" y="6161314"/>
+            <a:ext cx="152399" cy="141516"/>
+          </a:xfrm>
+          <a:prstGeom prst="flowChartConnector">
+            <a:avLst/>
+          </a:prstGeom>
+          <a:solidFill>
+            <a:schemeClr val="tx1"/>
+          </a:solidFill>
+        </p:spPr>
+        <p:style>
+          <a:lnRef idx="2">
+            <a:schemeClr val="accent1">
+              <a:shade val="15000"/>
+            </a:schemeClr>
+          </a:lnRef>
+          <a:fillRef idx="1">
+            <a:schemeClr val="accent1"/>
+          </a:fillRef>
+          <a:effectRef idx="0">
+            <a:schemeClr val="accent1"/>
+          </a:effectRef>
+          <a:fontRef idx="minor">
+            <a:schemeClr val="lt1"/>
+          </a:fontRef>
+        </p:style>
+        <p:txBody>
+          <a:bodyPr rtlCol="0" anchor="ctr"/>
+          <a:lstStyle/>
+          <a:p>
+            <a:pPr algn="ctr"/>
+            <a:endParaRPr kumimoji="1" lang="ja-JP" altLang="en-US"/>
+          </a:p>
+        </p:txBody>
+      </p:sp>
+      <p:sp>
+        <p:nvSpPr>
+          <p:cNvPr id="28" name="矢印: 右 27">
+            <a:extLst>
+              <a:ext uri="{FF2B5EF4-FFF2-40B4-BE49-F238E27FC236}">
+                <a16:creationId xmlns:a16="http://schemas.microsoft.com/office/drawing/2014/main" id="{12C062AB-9342-1FE2-C005-F4178D177BF1}"/>
+              </a:ext>
+            </a:extLst>
+          </p:cNvPr>
+          <p:cNvSpPr/>
+          <p:nvPr/>
+        </p:nvSpPr>
+        <p:spPr>
+          <a:xfrm rot="19836887">
+            <a:off x="6159731" y="5387914"/>
+            <a:ext cx="740229" cy="128445"/>
+          </a:xfrm>
+          <a:prstGeom prst="rightArrow">
+            <a:avLst/>
+          </a:prstGeom>
+          <a:solidFill>
+            <a:schemeClr val="accent5">
+              <a:lumMod val="75000"/>
+            </a:schemeClr>
+          </a:solidFill>
+        </p:spPr>
+        <p:style>
+          <a:lnRef idx="2">
+            <a:schemeClr val="accent1">
+              <a:shade val="15000"/>
+            </a:schemeClr>
+          </a:lnRef>
+          <a:fillRef idx="1">
+            <a:schemeClr val="accent1"/>
+          </a:fillRef>
+          <a:effectRef idx="0">
+            <a:schemeClr val="accent1"/>
+          </a:effectRef>
+          <a:fontRef idx="minor">
+            <a:schemeClr val="lt1"/>
+          </a:fontRef>
+        </p:style>
+        <p:txBody>
+          <a:bodyPr rtlCol="0" anchor="ctr"/>
+          <a:lstStyle/>
+          <a:p>
+            <a:pPr algn="ctr"/>
+            <a:endParaRPr kumimoji="1" lang="ja-JP" altLang="en-US"/>
+          </a:p>
+        </p:txBody>
+      </p:sp>
+      <p:sp>
+        <p:nvSpPr>
+          <p:cNvPr id="29" name="矢印: 右 28">
+            <a:extLst>
+              <a:ext uri="{FF2B5EF4-FFF2-40B4-BE49-F238E27FC236}">
+                <a16:creationId xmlns:a16="http://schemas.microsoft.com/office/drawing/2014/main" id="{BFE7CC86-93F9-392E-D822-CDCD4DC77ADF}"/>
+              </a:ext>
+            </a:extLst>
+          </p:cNvPr>
+          <p:cNvSpPr/>
+          <p:nvPr/>
+        </p:nvSpPr>
+        <p:spPr>
+          <a:xfrm rot="1118072">
+            <a:off x="6176954" y="5987951"/>
+            <a:ext cx="740229" cy="128445"/>
+          </a:xfrm>
+          <a:prstGeom prst="rightArrow">
+            <a:avLst/>
+          </a:prstGeom>
+          <a:solidFill>
+            <a:schemeClr val="accent5">
+              <a:lumMod val="75000"/>
+            </a:schemeClr>
+          </a:solidFill>
+        </p:spPr>
+        <p:style>
+          <a:lnRef idx="2">
+            <a:schemeClr val="accent1">
+              <a:shade val="15000"/>
+            </a:schemeClr>
+          </a:lnRef>
+          <a:fillRef idx="1">
+            <a:schemeClr val="accent1"/>
+          </a:fillRef>
+          <a:effectRef idx="0">
+            <a:schemeClr val="accent1"/>
+          </a:effectRef>
+          <a:fontRef idx="minor">
+            <a:schemeClr val="lt1"/>
+          </a:fontRef>
+        </p:style>
+        <p:txBody>
+          <a:bodyPr rtlCol="0" anchor="ctr"/>
+          <a:lstStyle/>
+          <a:p>
+            <a:pPr algn="ctr"/>
+            <a:endParaRPr kumimoji="1" lang="ja-JP" altLang="en-US"/>
+          </a:p>
+        </p:txBody>
+      </p:sp>
+      <mc:AlternateContent xmlns:mc="http://schemas.openxmlformats.org/markup-compatibility/2006" xmlns:a14="http://schemas.microsoft.com/office/drawing/2010/main">
+        <mc:Choice Requires="a14">
+          <p:sp>
+            <p:nvSpPr>
+              <p:cNvPr id="30" name="テキスト ボックス 29">
+                <a:extLst>
+                  <a:ext uri="{FF2B5EF4-FFF2-40B4-BE49-F238E27FC236}">
+                    <a16:creationId xmlns:a16="http://schemas.microsoft.com/office/drawing/2014/main" id="{108C5FC3-EA8F-AA65-EB3F-63D886D8D9BA}"/>
+                  </a:ext>
+                </a:extLst>
+              </p:cNvPr>
+              <p:cNvSpPr txBox="1"/>
+              <p:nvPr/>
+            </p:nvSpPr>
+            <p:spPr>
+              <a:xfrm>
+                <a:off x="5671243" y="4286750"/>
+                <a:ext cx="568778" cy="373372"/>
+              </a:xfrm>
+              <a:prstGeom prst="rect">
+                <a:avLst/>
+              </a:prstGeom>
+              <a:noFill/>
+            </p:spPr>
+            <p:txBody>
+              <a:bodyPr wrap="square" rtlCol="0">
+                <a:spAutoFit/>
+              </a:bodyPr>
+              <a:lstStyle/>
+              <a:p>
+                <a:pPr/>
+                <a14:m>
+                  <m:oMathPara xmlns:m="http://schemas.openxmlformats.org/officeDocument/2006/math">
+                    <m:oMathParaPr>
+                      <m:jc m:val="centerGroup"/>
+                    </m:oMathParaPr>
+                    <m:oMath xmlns:m="http://schemas.openxmlformats.org/officeDocument/2006/math">
+                      <m:sSubSup>
+                        <m:sSubSupPr>
+                          <m:ctrlPr>
+                            <a:rPr kumimoji="1" lang="en-US" altLang="ja-JP" b="0" i="1" smtClean="0">
+                              <a:latin typeface="Cambria Math" panose="02040503050406030204" pitchFamily="18" charset="0"/>
+                            </a:rPr>
+                          </m:ctrlPr>
+                        </m:sSubSupPr>
+                        <m:e>
+                          <m:acc>
+                            <m:accPr>
+                              <m:chr m:val="̃"/>
+                              <m:ctrlPr>
+                                <a:rPr kumimoji="1" lang="en-US" altLang="ja-JP" b="0" i="1" smtClean="0">
+                                  <a:latin typeface="Cambria Math" panose="02040503050406030204" pitchFamily="18" charset="0"/>
+                                </a:rPr>
+                              </m:ctrlPr>
+                            </m:accPr>
+                            <m:e>
+                              <m:r>
+                                <a:rPr kumimoji="1" lang="en-US" altLang="ja-JP" b="0" i="1" smtClean="0">
+                                  <a:latin typeface="Cambria Math" panose="02040503050406030204" pitchFamily="18" charset="0"/>
+                                </a:rPr>
+                                <m:t>𝑠</m:t>
+                              </m:r>
+                            </m:e>
+                          </m:acc>
+                        </m:e>
+                        <m:sub>
+                          <m:r>
+                            <a:rPr kumimoji="1" lang="en-US" altLang="ja-JP" b="0" i="1" smtClean="0">
+                              <a:latin typeface="Cambria Math" panose="02040503050406030204" pitchFamily="18" charset="0"/>
+                            </a:rPr>
+                            <m:t>𝑡</m:t>
+                          </m:r>
+                          <m:r>
+                            <a:rPr kumimoji="1" lang="en-US" altLang="ja-JP" b="0" i="1" smtClean="0">
+                              <a:latin typeface="Cambria Math" panose="02040503050406030204" pitchFamily="18" charset="0"/>
+                            </a:rPr>
+                            <m:t>+1</m:t>
+                          </m:r>
+                        </m:sub>
+                        <m:sup>
+                          <m:r>
+                            <a:rPr kumimoji="1" lang="en-US" altLang="ja-JP" b="0" i="1" smtClean="0">
+                              <a:latin typeface="Cambria Math" panose="02040503050406030204" pitchFamily="18" charset="0"/>
+                            </a:rPr>
+                            <m:t>1</m:t>
+                          </m:r>
+                        </m:sup>
+                      </m:sSubSup>
+                    </m:oMath>
+                  </m:oMathPara>
+                </a14:m>
+                <a:endParaRPr kumimoji="1" lang="ja-JP" altLang="en-US" dirty="0"/>
+              </a:p>
+            </p:txBody>
+          </p:sp>
+        </mc:Choice>
+        <mc:Fallback xmlns="">
+          <p:sp>
+            <p:nvSpPr>
+              <p:cNvPr id="30" name="テキスト ボックス 29">
+                <a:extLst>
+                  <a:ext uri="{FF2B5EF4-FFF2-40B4-BE49-F238E27FC236}">
+                    <a16:creationId xmlns:a16="http://schemas.microsoft.com/office/drawing/2014/main" id="{108C5FC3-EA8F-AA65-EB3F-63D886D8D9BA}"/>
+                  </a:ext>
+                </a:extLst>
+              </p:cNvPr>
+              <p:cNvSpPr txBox="1">
+                <a:spLocks noRot="1" noChangeAspect="1" noMove="1" noResize="1" noEditPoints="1" noAdjustHandles="1" noChangeArrowheads="1" noChangeShapeType="1" noTextEdit="1"/>
+              </p:cNvSpPr>
+              <p:nvPr/>
+            </p:nvSpPr>
+            <p:spPr>
+              <a:xfrm>
+                <a:off x="5671243" y="4286750"/>
+                <a:ext cx="568778" cy="373372"/>
+              </a:xfrm>
+              <a:prstGeom prst="rect">
+                <a:avLst/>
+              </a:prstGeom>
+              <a:blipFill>
+                <a:blip r:embed="rId7"/>
+                <a:stretch>
+                  <a:fillRect b="-1639"/>
+                </a:stretch>
+              </a:blipFill>
+            </p:spPr>
+            <p:txBody>
+              <a:bodyPr/>
+              <a:lstStyle/>
+              <a:p>
+                <a:r>
+                  <a:rPr lang="ja-JP" altLang="en-US">
+                    <a:noFill/>
+                  </a:rPr>
+                  <a:t> </a:t>
+                </a:r>
+              </a:p>
+            </p:txBody>
+          </p:sp>
+        </mc:Fallback>
+      </mc:AlternateContent>
+      <mc:AlternateContent xmlns:mc="http://schemas.openxmlformats.org/markup-compatibility/2006" xmlns:a14="http://schemas.microsoft.com/office/drawing/2010/main">
+        <mc:Choice Requires="a14">
+          <p:sp>
+            <p:nvSpPr>
+              <p:cNvPr id="31" name="テキスト ボックス 30">
+                <a:extLst>
+                  <a:ext uri="{FF2B5EF4-FFF2-40B4-BE49-F238E27FC236}">
+                    <a16:creationId xmlns:a16="http://schemas.microsoft.com/office/drawing/2014/main" id="{71E73CBB-E1FF-86A9-D8BC-6F05EC50C12B}"/>
+                  </a:ext>
+                </a:extLst>
+              </p:cNvPr>
+              <p:cNvSpPr txBox="1"/>
+              <p:nvPr/>
+            </p:nvSpPr>
+            <p:spPr>
+              <a:xfrm>
+                <a:off x="5676683" y="5293686"/>
+                <a:ext cx="568778" cy="373949"/>
+              </a:xfrm>
+              <a:prstGeom prst="rect">
+                <a:avLst/>
+              </a:prstGeom>
+              <a:noFill/>
+            </p:spPr>
+            <p:txBody>
+              <a:bodyPr wrap="square" rtlCol="0">
+                <a:spAutoFit/>
+              </a:bodyPr>
+              <a:lstStyle/>
+              <a:p>
+                <a:pPr/>
+                <a14:m>
+                  <m:oMathPara xmlns:m="http://schemas.openxmlformats.org/officeDocument/2006/math">
+                    <m:oMathParaPr>
+                      <m:jc m:val="centerGroup"/>
+                    </m:oMathParaPr>
+                    <m:oMath xmlns:m="http://schemas.openxmlformats.org/officeDocument/2006/math">
+                      <m:sSubSup>
+                        <m:sSubSupPr>
+                          <m:ctrlPr>
+                            <a:rPr kumimoji="1" lang="en-US" altLang="ja-JP" b="0" i="1" smtClean="0">
+                              <a:latin typeface="Cambria Math" panose="02040503050406030204" pitchFamily="18" charset="0"/>
+                            </a:rPr>
+                          </m:ctrlPr>
+                        </m:sSubSupPr>
+                        <m:e>
+                          <m:acc>
+                            <m:accPr>
+                              <m:chr m:val="̃"/>
+                              <m:ctrlPr>
+                                <a:rPr kumimoji="1" lang="en-US" altLang="ja-JP" b="0" i="1" smtClean="0">
+                                  <a:latin typeface="Cambria Math" panose="02040503050406030204" pitchFamily="18" charset="0"/>
+                                </a:rPr>
+                              </m:ctrlPr>
+                            </m:accPr>
+                            <m:e>
+                              <m:r>
+                                <a:rPr kumimoji="1" lang="en-US" altLang="ja-JP" b="0" i="1" smtClean="0">
+                                  <a:latin typeface="Cambria Math" panose="02040503050406030204" pitchFamily="18" charset="0"/>
+                                </a:rPr>
+                                <m:t>𝑠</m:t>
+                              </m:r>
+                            </m:e>
+                          </m:acc>
+                        </m:e>
+                        <m:sub>
+                          <m:r>
+                            <a:rPr kumimoji="1" lang="en-US" altLang="ja-JP" b="0" i="1" smtClean="0">
+                              <a:latin typeface="Cambria Math" panose="02040503050406030204" pitchFamily="18" charset="0"/>
+                            </a:rPr>
+                            <m:t>𝑡</m:t>
+                          </m:r>
+                          <m:r>
+                            <a:rPr kumimoji="1" lang="en-US" altLang="ja-JP" b="0" i="1" smtClean="0">
+                              <a:latin typeface="Cambria Math" panose="02040503050406030204" pitchFamily="18" charset="0"/>
+                            </a:rPr>
+                            <m:t>+1</m:t>
+                          </m:r>
+                        </m:sub>
+                        <m:sup>
+                          <m:r>
+                            <a:rPr kumimoji="1" lang="en-US" altLang="ja-JP" b="0" i="1" smtClean="0">
+                              <a:latin typeface="Cambria Math" panose="02040503050406030204" pitchFamily="18" charset="0"/>
+                            </a:rPr>
+                            <m:t>2</m:t>
+                          </m:r>
+                        </m:sup>
+                      </m:sSubSup>
+                    </m:oMath>
+                  </m:oMathPara>
+                </a14:m>
+                <a:endParaRPr kumimoji="1" lang="ja-JP" altLang="en-US" dirty="0"/>
+              </a:p>
+            </p:txBody>
+          </p:sp>
+        </mc:Choice>
+        <mc:Fallback xmlns="">
+          <p:sp>
+            <p:nvSpPr>
+              <p:cNvPr id="31" name="テキスト ボックス 30">
+                <a:extLst>
+                  <a:ext uri="{FF2B5EF4-FFF2-40B4-BE49-F238E27FC236}">
+                    <a16:creationId xmlns:a16="http://schemas.microsoft.com/office/drawing/2014/main" id="{71E73CBB-E1FF-86A9-D8BC-6F05EC50C12B}"/>
+                  </a:ext>
+                </a:extLst>
+              </p:cNvPr>
+              <p:cNvSpPr txBox="1">
+                <a:spLocks noRot="1" noChangeAspect="1" noMove="1" noResize="1" noEditPoints="1" noAdjustHandles="1" noChangeArrowheads="1" noChangeShapeType="1" noTextEdit="1"/>
+              </p:cNvSpPr>
+              <p:nvPr/>
+            </p:nvSpPr>
+            <p:spPr>
+              <a:xfrm>
+                <a:off x="5676683" y="5293686"/>
+                <a:ext cx="568778" cy="373949"/>
+              </a:xfrm>
+              <a:prstGeom prst="rect">
+                <a:avLst/>
+              </a:prstGeom>
+              <a:blipFill>
+                <a:blip r:embed="rId8"/>
+                <a:stretch>
+                  <a:fillRect/>
+                </a:stretch>
+              </a:blipFill>
+            </p:spPr>
+            <p:txBody>
+              <a:bodyPr/>
+              <a:lstStyle/>
+              <a:p>
+                <a:r>
+                  <a:rPr lang="ja-JP" altLang="en-US">
+                    <a:noFill/>
+                  </a:rPr>
+                  <a:t> </a:t>
+                </a:r>
+              </a:p>
+            </p:txBody>
+          </p:sp>
+        </mc:Fallback>
+      </mc:AlternateContent>
+      <mc:AlternateContent xmlns:mc="http://schemas.openxmlformats.org/markup-compatibility/2006" xmlns:a14="http://schemas.microsoft.com/office/drawing/2010/main">
+        <mc:Choice Requires="a14">
+          <p:sp>
+            <p:nvSpPr>
+              <p:cNvPr id="32" name="テキスト ボックス 31">
+                <a:extLst>
+                  <a:ext uri="{FF2B5EF4-FFF2-40B4-BE49-F238E27FC236}">
+                    <a16:creationId xmlns:a16="http://schemas.microsoft.com/office/drawing/2014/main" id="{5057AC38-DBBC-7323-254C-4704065B3C70}"/>
+                  </a:ext>
+                </a:extLst>
+              </p:cNvPr>
+              <p:cNvSpPr txBox="1"/>
+              <p:nvPr/>
+            </p:nvSpPr>
+            <p:spPr>
+              <a:xfrm>
+                <a:off x="7383008" y="4936671"/>
+                <a:ext cx="568778" cy="405367"/>
+              </a:xfrm>
+              <a:prstGeom prst="rect">
+                <a:avLst/>
+              </a:prstGeom>
+              <a:noFill/>
+            </p:spPr>
+            <p:txBody>
+              <a:bodyPr wrap="square" rtlCol="0">
+                <a:spAutoFit/>
+              </a:bodyPr>
+              <a:lstStyle/>
+              <a:p>
+                <a:pPr/>
+                <a14:m>
+                  <m:oMathPara xmlns:m="http://schemas.openxmlformats.org/officeDocument/2006/math">
+                    <m:oMathParaPr>
+                      <m:jc m:val="centerGroup"/>
+                    </m:oMathParaPr>
+                    <m:oMath xmlns:m="http://schemas.openxmlformats.org/officeDocument/2006/math">
+                      <m:sSubSup>
+                        <m:sSubSupPr>
+                          <m:ctrlPr>
+                            <a:rPr kumimoji="1" lang="en-US" altLang="ja-JP" b="0" i="1" smtClean="0">
+                              <a:latin typeface="Cambria Math" panose="02040503050406030204" pitchFamily="18" charset="0"/>
+                            </a:rPr>
+                          </m:ctrlPr>
+                        </m:sSubSupPr>
+                        <m:e>
+                          <m:acc>
+                            <m:accPr>
+                              <m:chr m:val="̃"/>
+                              <m:ctrlPr>
+                                <a:rPr kumimoji="1" lang="en-US" altLang="ja-JP" b="0" i="1" smtClean="0">
+                                  <a:latin typeface="Cambria Math" panose="02040503050406030204" pitchFamily="18" charset="0"/>
+                                </a:rPr>
+                              </m:ctrlPr>
+                            </m:accPr>
+                            <m:e>
+                              <m:r>
+                                <a:rPr kumimoji="1" lang="en-US" altLang="ja-JP" b="0" i="1" smtClean="0">
+                                  <a:latin typeface="Cambria Math" panose="02040503050406030204" pitchFamily="18" charset="0"/>
+                                </a:rPr>
+                                <m:t>𝑠</m:t>
+                              </m:r>
+                            </m:e>
+                          </m:acc>
+                        </m:e>
+                        <m:sub>
+                          <m:r>
+                            <a:rPr kumimoji="1" lang="en-US" altLang="ja-JP" b="0" i="1" smtClean="0">
+                              <a:latin typeface="Cambria Math" panose="02040503050406030204" pitchFamily="18" charset="0"/>
+                            </a:rPr>
+                            <m:t>𝑡</m:t>
+                          </m:r>
+                          <m:r>
+                            <a:rPr kumimoji="1" lang="en-US" altLang="ja-JP" b="0" i="1" smtClean="0">
+                              <a:latin typeface="Cambria Math" panose="02040503050406030204" pitchFamily="18" charset="0"/>
+                            </a:rPr>
+                            <m:t>+2</m:t>
+                          </m:r>
+                        </m:sub>
+                        <m:sup>
+                          <m:r>
+                            <a:rPr kumimoji="1" lang="en-US" altLang="ja-JP" b="0" i="1" smtClean="0">
+                              <a:latin typeface="Cambria Math" panose="02040503050406030204" pitchFamily="18" charset="0"/>
+                            </a:rPr>
+                            <m:t>2,1</m:t>
+                          </m:r>
+                        </m:sup>
+                      </m:sSubSup>
+                    </m:oMath>
+                  </m:oMathPara>
+                </a14:m>
+                <a:endParaRPr kumimoji="1" lang="ja-JP" altLang="en-US" dirty="0"/>
+              </a:p>
+            </p:txBody>
+          </p:sp>
+        </mc:Choice>
+        <mc:Fallback xmlns="">
+          <p:sp>
+            <p:nvSpPr>
+              <p:cNvPr id="32" name="テキスト ボックス 31">
+                <a:extLst>
+                  <a:ext uri="{FF2B5EF4-FFF2-40B4-BE49-F238E27FC236}">
+                    <a16:creationId xmlns:a16="http://schemas.microsoft.com/office/drawing/2014/main" id="{5057AC38-DBBC-7323-254C-4704065B3C70}"/>
+                  </a:ext>
+                </a:extLst>
+              </p:cNvPr>
+              <p:cNvSpPr txBox="1">
+                <a:spLocks noRot="1" noChangeAspect="1" noMove="1" noResize="1" noEditPoints="1" noAdjustHandles="1" noChangeArrowheads="1" noChangeShapeType="1" noTextEdit="1"/>
+              </p:cNvSpPr>
+              <p:nvPr/>
+            </p:nvSpPr>
+            <p:spPr>
+              <a:xfrm>
+                <a:off x="7383008" y="4936671"/>
+                <a:ext cx="568778" cy="405367"/>
+              </a:xfrm>
+              <a:prstGeom prst="rect">
+                <a:avLst/>
+              </a:prstGeom>
+              <a:blipFill>
+                <a:blip r:embed="rId9"/>
+                <a:stretch>
+                  <a:fillRect b="-1515"/>
+                </a:stretch>
+              </a:blipFill>
+            </p:spPr>
+            <p:txBody>
+              <a:bodyPr/>
+              <a:lstStyle/>
+              <a:p>
+                <a:r>
+                  <a:rPr lang="ja-JP" altLang="en-US">
+                    <a:noFill/>
+                  </a:rPr>
+                  <a:t> </a:t>
+                </a:r>
+              </a:p>
+            </p:txBody>
+          </p:sp>
+        </mc:Fallback>
+      </mc:AlternateContent>
+      <mc:AlternateContent xmlns:mc="http://schemas.openxmlformats.org/markup-compatibility/2006" xmlns:a14="http://schemas.microsoft.com/office/drawing/2010/main">
+        <mc:Choice Requires="a14">
+          <p:sp>
+            <p:nvSpPr>
+              <p:cNvPr id="33" name="テキスト ボックス 32">
+                <a:extLst>
+                  <a:ext uri="{FF2B5EF4-FFF2-40B4-BE49-F238E27FC236}">
+                    <a16:creationId xmlns:a16="http://schemas.microsoft.com/office/drawing/2014/main" id="{96F70B12-F810-E926-EFAE-78B28ECE3D06}"/>
+                  </a:ext>
+                </a:extLst>
+              </p:cNvPr>
+              <p:cNvSpPr txBox="1"/>
+              <p:nvPr/>
+            </p:nvSpPr>
+            <p:spPr>
+              <a:xfrm>
+                <a:off x="7383008" y="6051793"/>
+                <a:ext cx="568778" cy="405945"/>
+              </a:xfrm>
+              <a:prstGeom prst="rect">
+                <a:avLst/>
+              </a:prstGeom>
+              <a:noFill/>
+            </p:spPr>
+            <p:txBody>
+              <a:bodyPr wrap="square" rtlCol="0">
+                <a:spAutoFit/>
+              </a:bodyPr>
+              <a:lstStyle/>
+              <a:p>
+                <a:pPr/>
+                <a14:m>
+                  <m:oMathPara xmlns:m="http://schemas.openxmlformats.org/officeDocument/2006/math">
+                    <m:oMathParaPr>
+                      <m:jc m:val="centerGroup"/>
+                    </m:oMathParaPr>
+                    <m:oMath xmlns:m="http://schemas.openxmlformats.org/officeDocument/2006/math">
+                      <m:sSubSup>
+                        <m:sSubSupPr>
+                          <m:ctrlPr>
+                            <a:rPr kumimoji="1" lang="en-US" altLang="ja-JP" b="0" i="1" smtClean="0">
+                              <a:latin typeface="Cambria Math" panose="02040503050406030204" pitchFamily="18" charset="0"/>
+                            </a:rPr>
+                          </m:ctrlPr>
+                        </m:sSubSupPr>
+                        <m:e>
+                          <m:acc>
+                            <m:accPr>
+                              <m:chr m:val="̃"/>
+                              <m:ctrlPr>
+                                <a:rPr kumimoji="1" lang="en-US" altLang="ja-JP" b="0" i="1" smtClean="0">
+                                  <a:latin typeface="Cambria Math" panose="02040503050406030204" pitchFamily="18" charset="0"/>
+                                </a:rPr>
+                              </m:ctrlPr>
+                            </m:accPr>
+                            <m:e>
+                              <m:r>
+                                <a:rPr kumimoji="1" lang="en-US" altLang="ja-JP" b="0" i="1" smtClean="0">
+                                  <a:latin typeface="Cambria Math" panose="02040503050406030204" pitchFamily="18" charset="0"/>
+                                </a:rPr>
+                                <m:t>𝑠</m:t>
+                              </m:r>
+                            </m:e>
+                          </m:acc>
+                        </m:e>
+                        <m:sub>
+                          <m:r>
+                            <a:rPr kumimoji="1" lang="en-US" altLang="ja-JP" b="0" i="1" smtClean="0">
+                              <a:latin typeface="Cambria Math" panose="02040503050406030204" pitchFamily="18" charset="0"/>
+                            </a:rPr>
+                            <m:t>𝑡</m:t>
+                          </m:r>
+                          <m:r>
+                            <a:rPr kumimoji="1" lang="en-US" altLang="ja-JP" b="0" i="1" smtClean="0">
+                              <a:latin typeface="Cambria Math" panose="02040503050406030204" pitchFamily="18" charset="0"/>
+                            </a:rPr>
+                            <m:t>+2</m:t>
+                          </m:r>
+                        </m:sub>
+                        <m:sup>
+                          <m:r>
+                            <a:rPr kumimoji="1" lang="en-US" altLang="ja-JP" b="0" i="1" smtClean="0">
+                              <a:latin typeface="Cambria Math" panose="02040503050406030204" pitchFamily="18" charset="0"/>
+                            </a:rPr>
+                            <m:t>2,2</m:t>
+                          </m:r>
+                        </m:sup>
+                      </m:sSubSup>
+                    </m:oMath>
+                  </m:oMathPara>
+                </a14:m>
+                <a:endParaRPr kumimoji="1" lang="ja-JP" altLang="en-US" dirty="0"/>
+              </a:p>
+            </p:txBody>
+          </p:sp>
+        </mc:Choice>
+        <mc:Fallback xmlns="">
+          <p:sp>
+            <p:nvSpPr>
+              <p:cNvPr id="33" name="テキスト ボックス 32">
+                <a:extLst>
+                  <a:ext uri="{FF2B5EF4-FFF2-40B4-BE49-F238E27FC236}">
+                    <a16:creationId xmlns:a16="http://schemas.microsoft.com/office/drawing/2014/main" id="{96F70B12-F810-E926-EFAE-78B28ECE3D06}"/>
+                  </a:ext>
+                </a:extLst>
+              </p:cNvPr>
+              <p:cNvSpPr txBox="1">
+                <a:spLocks noRot="1" noChangeAspect="1" noMove="1" noResize="1" noEditPoints="1" noAdjustHandles="1" noChangeArrowheads="1" noChangeShapeType="1" noTextEdit="1"/>
+              </p:cNvSpPr>
+              <p:nvPr/>
+            </p:nvSpPr>
+            <p:spPr>
+              <a:xfrm>
+                <a:off x="7383008" y="6051793"/>
+                <a:ext cx="568778" cy="405945"/>
+              </a:xfrm>
+              <a:prstGeom prst="rect">
+                <a:avLst/>
+              </a:prstGeom>
+              <a:blipFill>
+                <a:blip r:embed="rId10"/>
+                <a:stretch>
+                  <a:fillRect b="-1515"/>
+                </a:stretch>
+              </a:blipFill>
+            </p:spPr>
+            <p:txBody>
+              <a:bodyPr/>
+              <a:lstStyle/>
+              <a:p>
+                <a:r>
+                  <a:rPr lang="ja-JP" altLang="en-US">
+                    <a:noFill/>
+                  </a:rPr>
+                  <a:t> </a:t>
+                </a:r>
+              </a:p>
+            </p:txBody>
+          </p:sp>
+        </mc:Fallback>
+      </mc:AlternateContent>
+      <mc:AlternateContent xmlns:mc="http://schemas.openxmlformats.org/markup-compatibility/2006" xmlns:a14="http://schemas.microsoft.com/office/drawing/2010/main">
+        <mc:Choice Requires="a14">
+          <p:sp>
+            <p:nvSpPr>
+              <p:cNvPr id="34" name="フローチャート: 処理 33">
+                <a:extLst>
+                  <a:ext uri="{FF2B5EF4-FFF2-40B4-BE49-F238E27FC236}">
+                    <a16:creationId xmlns:a16="http://schemas.microsoft.com/office/drawing/2014/main" id="{7414F0AD-3AA4-3034-1E99-A920FB7256D7}"/>
+                  </a:ext>
+                </a:extLst>
+              </p:cNvPr>
+              <p:cNvSpPr/>
+              <p:nvPr/>
+            </p:nvSpPr>
+            <p:spPr>
+              <a:xfrm>
+                <a:off x="2658608" y="4757551"/>
+                <a:ext cx="429986" cy="358239"/>
+              </a:xfrm>
+              <a:prstGeom prst="flowChartProcess">
+                <a:avLst/>
+              </a:prstGeom>
+            </p:spPr>
+            <p:style>
+              <a:lnRef idx="2">
+                <a:schemeClr val="accent1">
+                  <a:shade val="15000"/>
+                </a:schemeClr>
+              </a:lnRef>
+              <a:fillRef idx="1">
+                <a:schemeClr val="accent1"/>
+              </a:fillRef>
+              <a:effectRef idx="0">
+                <a:schemeClr val="accent1"/>
+              </a:effectRef>
+              <a:fontRef idx="minor">
+                <a:schemeClr val="lt1"/>
+              </a:fontRef>
+            </p:style>
+            <p:txBody>
+              <a:bodyPr rtlCol="0" anchor="ctr"/>
+              <a:lstStyle/>
+              <a:p>
+                <a:pPr algn="ctr"/>
+                <a14:m>
+                  <m:oMathPara xmlns:m="http://schemas.openxmlformats.org/officeDocument/2006/math">
+                    <m:oMathParaPr>
+                      <m:jc m:val="center"/>
+                    </m:oMathParaPr>
+                    <m:oMath xmlns:m="http://schemas.openxmlformats.org/officeDocument/2006/math">
+                      <m:sSubSup>
+                        <m:sSubSupPr>
+                          <m:ctrlPr>
+                            <a:rPr kumimoji="1" lang="en-US" altLang="ja-JP" b="0" i="1" smtClean="0">
+                              <a:latin typeface="Cambria Math" panose="02040503050406030204" pitchFamily="18" charset="0"/>
+                            </a:rPr>
+                          </m:ctrlPr>
+                        </m:sSubSupPr>
+                        <m:e>
+                          <m:r>
+                            <a:rPr kumimoji="1" lang="en-US" altLang="ja-JP" b="0" i="1" smtClean="0">
+                              <a:latin typeface="Cambria Math" panose="02040503050406030204" pitchFamily="18" charset="0"/>
+                            </a:rPr>
+                            <m:t>𝑟</m:t>
+                          </m:r>
+                        </m:e>
+                        <m:sub>
+                          <m:r>
+                            <a:rPr kumimoji="1" lang="en-US" altLang="ja-JP" b="0" i="1" smtClean="0">
+                              <a:latin typeface="Cambria Math" panose="02040503050406030204" pitchFamily="18" charset="0"/>
+                            </a:rPr>
+                            <m:t>𝑓</m:t>
+                          </m:r>
+                        </m:sub>
+                        <m:sup>
+                          <m:r>
+                            <a:rPr kumimoji="1" lang="en-US" altLang="ja-JP" b="0" i="1" smtClean="0">
+                              <a:latin typeface="Cambria Math" panose="02040503050406030204" pitchFamily="18" charset="0"/>
+                            </a:rPr>
+                            <m:t>1</m:t>
+                          </m:r>
+                        </m:sup>
+                      </m:sSubSup>
+                    </m:oMath>
+                  </m:oMathPara>
+                </a14:m>
+                <a:endParaRPr kumimoji="1" lang="ja-JP" altLang="en-US" dirty="0"/>
+              </a:p>
+            </p:txBody>
+          </p:sp>
+        </mc:Choice>
+        <mc:Fallback xmlns="">
+          <p:sp>
+            <p:nvSpPr>
+              <p:cNvPr id="34" name="フローチャート: 処理 33">
+                <a:extLst>
+                  <a:ext uri="{FF2B5EF4-FFF2-40B4-BE49-F238E27FC236}">
+                    <a16:creationId xmlns:a16="http://schemas.microsoft.com/office/drawing/2014/main" id="{7414F0AD-3AA4-3034-1E99-A920FB7256D7}"/>
+                  </a:ext>
+                </a:extLst>
+              </p:cNvPr>
+              <p:cNvSpPr>
+                <a:spLocks noRot="1" noChangeAspect="1" noMove="1" noResize="1" noEditPoints="1" noAdjustHandles="1" noChangeArrowheads="1" noChangeShapeType="1" noTextEdit="1"/>
+              </p:cNvSpPr>
+              <p:nvPr/>
+            </p:nvSpPr>
+            <p:spPr>
+              <a:xfrm>
+                <a:off x="2658608" y="4757551"/>
+                <a:ext cx="429986" cy="358239"/>
+              </a:xfrm>
+              <a:prstGeom prst="flowChartProcess">
+                <a:avLst/>
+              </a:prstGeom>
+              <a:blipFill>
+                <a:blip r:embed="rId11"/>
+                <a:stretch>
+                  <a:fillRect b="-16393"/>
+                </a:stretch>
+              </a:blipFill>
+            </p:spPr>
+            <p:txBody>
+              <a:bodyPr/>
+              <a:lstStyle/>
+              <a:p>
+                <a:r>
+                  <a:rPr lang="ja-JP" altLang="en-US">
+                    <a:noFill/>
+                  </a:rPr>
+                  <a:t> </a:t>
+                </a:r>
+              </a:p>
+            </p:txBody>
+          </p:sp>
+        </mc:Fallback>
+      </mc:AlternateContent>
+      <mc:AlternateContent xmlns:mc="http://schemas.openxmlformats.org/markup-compatibility/2006" xmlns:a14="http://schemas.microsoft.com/office/drawing/2010/main">
+        <mc:Choice Requires="a14">
+          <p:sp>
+            <p:nvSpPr>
+              <p:cNvPr id="36" name="フローチャート: 処理 35">
+                <a:extLst>
+                  <a:ext uri="{FF2B5EF4-FFF2-40B4-BE49-F238E27FC236}">
+                    <a16:creationId xmlns:a16="http://schemas.microsoft.com/office/drawing/2014/main" id="{3780CF3E-FF18-39B2-7E10-0AAC96D4D93E}"/>
+                  </a:ext>
+                </a:extLst>
+              </p:cNvPr>
+              <p:cNvSpPr/>
+              <p:nvPr/>
+            </p:nvSpPr>
+            <p:spPr>
+              <a:xfrm>
+                <a:off x="6488317" y="3947060"/>
+                <a:ext cx="429986" cy="358239"/>
+              </a:xfrm>
+              <a:prstGeom prst="flowChartProcess">
+                <a:avLst/>
+              </a:prstGeom>
+            </p:spPr>
+            <p:style>
+              <a:lnRef idx="2">
+                <a:schemeClr val="accent1">
+                  <a:shade val="15000"/>
+                </a:schemeClr>
+              </a:lnRef>
+              <a:fillRef idx="1">
+                <a:schemeClr val="accent1"/>
+              </a:fillRef>
+              <a:effectRef idx="0">
+                <a:schemeClr val="accent1"/>
+              </a:effectRef>
+              <a:fontRef idx="minor">
+                <a:schemeClr val="lt1"/>
+              </a:fontRef>
+            </p:style>
+            <p:txBody>
+              <a:bodyPr rtlCol="0" anchor="ctr"/>
+              <a:lstStyle/>
+              <a:p>
+                <a:pPr algn="ctr"/>
+                <a14:m>
+                  <m:oMathPara xmlns:m="http://schemas.openxmlformats.org/officeDocument/2006/math">
+                    <m:oMathParaPr>
+                      <m:jc m:val="center"/>
+                    </m:oMathParaPr>
+                    <m:oMath xmlns:m="http://schemas.openxmlformats.org/officeDocument/2006/math">
+                      <m:sSubSup>
+                        <m:sSubSupPr>
+                          <m:ctrlPr>
+                            <a:rPr kumimoji="1" lang="en-US" altLang="ja-JP" b="0" i="1" smtClean="0">
+                              <a:latin typeface="Cambria Math" panose="02040503050406030204" pitchFamily="18" charset="0"/>
+                            </a:rPr>
+                          </m:ctrlPr>
+                        </m:sSubSupPr>
+                        <m:e>
+                          <m:acc>
+                            <m:accPr>
+                              <m:chr m:val="̃"/>
+                              <m:ctrlPr>
+                                <a:rPr kumimoji="1" lang="en-US" altLang="ja-JP" b="0" i="1" smtClean="0">
+                                  <a:latin typeface="Cambria Math" panose="02040503050406030204" pitchFamily="18" charset="0"/>
+                                </a:rPr>
+                              </m:ctrlPr>
+                            </m:accPr>
+                            <m:e>
+                              <m:r>
+                                <a:rPr kumimoji="1" lang="en-US" altLang="ja-JP" b="0" i="1" smtClean="0">
+                                  <a:latin typeface="Cambria Math" panose="02040503050406030204" pitchFamily="18" charset="0"/>
+                                </a:rPr>
+                                <m:t>𝑟</m:t>
+                              </m:r>
+                            </m:e>
+                          </m:acc>
+                        </m:e>
+                        <m:sub>
+                          <m:r>
+                            <a:rPr kumimoji="1" lang="en-US" altLang="ja-JP" b="0" i="1" smtClean="0">
+                              <a:latin typeface="Cambria Math" panose="02040503050406030204" pitchFamily="18" charset="0"/>
+                            </a:rPr>
+                            <m:t>𝑓</m:t>
+                          </m:r>
+                        </m:sub>
+                        <m:sup>
+                          <m:r>
+                            <a:rPr kumimoji="1" lang="en-US" altLang="ja-JP" b="0" i="1" smtClean="0">
+                              <a:latin typeface="Cambria Math" panose="02040503050406030204" pitchFamily="18" charset="0"/>
+                            </a:rPr>
+                            <m:t>2</m:t>
+                          </m:r>
+                        </m:sup>
+                      </m:sSubSup>
+                      <m:r>
+                        <a:rPr kumimoji="1" lang="en-US" altLang="ja-JP" b="0" i="1" smtClean="0">
+                          <a:latin typeface="Cambria Math" panose="02040503050406030204" pitchFamily="18" charset="0"/>
+                        </a:rPr>
+                        <m:t>′</m:t>
+                      </m:r>
+                    </m:oMath>
+                  </m:oMathPara>
+                </a14:m>
+                <a:endParaRPr kumimoji="1" lang="ja-JP" altLang="en-US" dirty="0"/>
+              </a:p>
+            </p:txBody>
+          </p:sp>
+        </mc:Choice>
+        <mc:Fallback xmlns="">
+          <p:sp>
+            <p:nvSpPr>
+              <p:cNvPr id="36" name="フローチャート: 処理 35">
+                <a:extLst>
+                  <a:ext uri="{FF2B5EF4-FFF2-40B4-BE49-F238E27FC236}">
+                    <a16:creationId xmlns:a16="http://schemas.microsoft.com/office/drawing/2014/main" id="{3780CF3E-FF18-39B2-7E10-0AAC96D4D93E}"/>
+                  </a:ext>
+                </a:extLst>
+              </p:cNvPr>
+              <p:cNvSpPr>
+                <a:spLocks noRot="1" noChangeAspect="1" noMove="1" noResize="1" noEditPoints="1" noAdjustHandles="1" noChangeArrowheads="1" noChangeShapeType="1" noTextEdit="1"/>
+              </p:cNvSpPr>
+              <p:nvPr/>
+            </p:nvSpPr>
+            <p:spPr>
+              <a:xfrm>
+                <a:off x="6488317" y="3947060"/>
+                <a:ext cx="429986" cy="358239"/>
+              </a:xfrm>
+              <a:prstGeom prst="flowChartProcess">
+                <a:avLst/>
+              </a:prstGeom>
+              <a:blipFill>
+                <a:blip r:embed="rId12"/>
+                <a:stretch>
+                  <a:fillRect l="-2740" b="-16393"/>
+                </a:stretch>
+              </a:blipFill>
+            </p:spPr>
+            <p:txBody>
+              <a:bodyPr/>
+              <a:lstStyle/>
+              <a:p>
+                <a:r>
+                  <a:rPr lang="ja-JP" altLang="en-US">
+                    <a:noFill/>
+                  </a:rPr>
+                  <a:t> </a:t>
+                </a:r>
+              </a:p>
+            </p:txBody>
+          </p:sp>
+        </mc:Fallback>
+      </mc:AlternateContent>
+      <mc:AlternateContent xmlns:mc="http://schemas.openxmlformats.org/markup-compatibility/2006" xmlns:a14="http://schemas.microsoft.com/office/drawing/2010/main">
+        <mc:Choice Requires="a14">
+          <p:sp>
+            <p:nvSpPr>
+              <p:cNvPr id="37" name="フローチャート: 処理 36">
+                <a:extLst>
+                  <a:ext uri="{FF2B5EF4-FFF2-40B4-BE49-F238E27FC236}">
+                    <a16:creationId xmlns:a16="http://schemas.microsoft.com/office/drawing/2014/main" id="{C6B3EA49-D2D3-9E7E-373E-F5FAC51C16C3}"/>
+                  </a:ext>
+                </a:extLst>
+              </p:cNvPr>
+              <p:cNvSpPr/>
+              <p:nvPr/>
+            </p:nvSpPr>
+            <p:spPr>
+              <a:xfrm>
+                <a:off x="6495176" y="5545652"/>
+                <a:ext cx="429986" cy="358239"/>
+              </a:xfrm>
+              <a:prstGeom prst="flowChartProcess">
+                <a:avLst/>
+              </a:prstGeom>
+            </p:spPr>
+            <p:style>
+              <a:lnRef idx="2">
+                <a:schemeClr val="accent1">
+                  <a:shade val="15000"/>
+                </a:schemeClr>
+              </a:lnRef>
+              <a:fillRef idx="1">
+                <a:schemeClr val="accent1"/>
+              </a:fillRef>
+              <a:effectRef idx="0">
+                <a:schemeClr val="accent1"/>
+              </a:effectRef>
+              <a:fontRef idx="minor">
+                <a:schemeClr val="lt1"/>
+              </a:fontRef>
+            </p:style>
+            <p:txBody>
+              <a:bodyPr rtlCol="0" anchor="ctr"/>
+              <a:lstStyle/>
+              <a:p>
+                <a:pPr algn="ctr"/>
+                <a14:m>
+                  <m:oMathPara xmlns:m="http://schemas.openxmlformats.org/officeDocument/2006/math">
+                    <m:oMathParaPr>
+                      <m:jc m:val="center"/>
+                    </m:oMathParaPr>
+                    <m:oMath xmlns:m="http://schemas.openxmlformats.org/officeDocument/2006/math">
+                      <m:sSubSup>
+                        <m:sSubSupPr>
+                          <m:ctrlPr>
+                            <a:rPr kumimoji="1" lang="en-US" altLang="ja-JP" b="0" i="1" smtClean="0">
+                              <a:latin typeface="Cambria Math" panose="02040503050406030204" pitchFamily="18" charset="0"/>
+                            </a:rPr>
+                          </m:ctrlPr>
+                        </m:sSubSupPr>
+                        <m:e>
+                          <m:acc>
+                            <m:accPr>
+                              <m:chr m:val="̃"/>
+                              <m:ctrlPr>
+                                <a:rPr kumimoji="1" lang="en-US" altLang="ja-JP" b="0" i="1" smtClean="0">
+                                  <a:latin typeface="Cambria Math" panose="02040503050406030204" pitchFamily="18" charset="0"/>
+                                </a:rPr>
+                              </m:ctrlPr>
+                            </m:accPr>
+                            <m:e>
+                              <m:r>
+                                <a:rPr kumimoji="1" lang="en-US" altLang="ja-JP" b="0" i="1" smtClean="0">
+                                  <a:latin typeface="Cambria Math" panose="02040503050406030204" pitchFamily="18" charset="0"/>
+                                </a:rPr>
+                                <m:t>𝑟</m:t>
+                              </m:r>
+                            </m:e>
+                          </m:acc>
+                        </m:e>
+                        <m:sub>
+                          <m:r>
+                            <a:rPr kumimoji="1" lang="en-US" altLang="ja-JP" b="0" i="1" smtClean="0">
+                              <a:latin typeface="Cambria Math" panose="02040503050406030204" pitchFamily="18" charset="0"/>
+                            </a:rPr>
+                            <m:t>𝑓</m:t>
+                          </m:r>
+                        </m:sub>
+                        <m:sup>
+                          <m:r>
+                            <a:rPr kumimoji="1" lang="en-US" altLang="ja-JP" b="0" i="1" smtClean="0">
+                              <a:latin typeface="Cambria Math" panose="02040503050406030204" pitchFamily="18" charset="0"/>
+                            </a:rPr>
+                            <m:t>2</m:t>
+                          </m:r>
+                        </m:sup>
+                      </m:sSubSup>
+                      <m:r>
+                        <a:rPr kumimoji="1" lang="en-US" altLang="ja-JP" b="0" i="1" smtClean="0">
+                          <a:latin typeface="Cambria Math" panose="02040503050406030204" pitchFamily="18" charset="0"/>
+                        </a:rPr>
+                        <m:t>"</m:t>
+                      </m:r>
+                    </m:oMath>
+                  </m:oMathPara>
+                </a14:m>
+                <a:endParaRPr kumimoji="1" lang="ja-JP" altLang="en-US" dirty="0"/>
+              </a:p>
+            </p:txBody>
+          </p:sp>
+        </mc:Choice>
+        <mc:Fallback xmlns="">
+          <p:sp>
+            <p:nvSpPr>
+              <p:cNvPr id="37" name="フローチャート: 処理 36">
+                <a:extLst>
+                  <a:ext uri="{FF2B5EF4-FFF2-40B4-BE49-F238E27FC236}">
+                    <a16:creationId xmlns:a16="http://schemas.microsoft.com/office/drawing/2014/main" id="{C6B3EA49-D2D3-9E7E-373E-F5FAC51C16C3}"/>
+                  </a:ext>
+                </a:extLst>
+              </p:cNvPr>
+              <p:cNvSpPr>
+                <a:spLocks noRot="1" noChangeAspect="1" noMove="1" noResize="1" noEditPoints="1" noAdjustHandles="1" noChangeArrowheads="1" noChangeShapeType="1" noTextEdit="1"/>
+              </p:cNvSpPr>
+              <p:nvPr/>
+            </p:nvSpPr>
+            <p:spPr>
+              <a:xfrm>
+                <a:off x="6495176" y="5545652"/>
+                <a:ext cx="429986" cy="358239"/>
+              </a:xfrm>
+              <a:prstGeom prst="flowChartProcess">
+                <a:avLst/>
+              </a:prstGeom>
+              <a:blipFill>
+                <a:blip r:embed="rId13"/>
+                <a:stretch>
+                  <a:fillRect l="-5479" b="-16667"/>
+                </a:stretch>
+              </a:blipFill>
+            </p:spPr>
+            <p:txBody>
+              <a:bodyPr/>
+              <a:lstStyle/>
+              <a:p>
+                <a:r>
+                  <a:rPr lang="ja-JP" altLang="en-US">
+                    <a:noFill/>
+                  </a:rPr>
+                  <a:t> </a:t>
+                </a:r>
+              </a:p>
+            </p:txBody>
+          </p:sp>
+        </mc:Fallback>
+      </mc:AlternateContent>
+      <mc:AlternateContent xmlns:mc="http://schemas.openxmlformats.org/markup-compatibility/2006" xmlns:a14="http://schemas.microsoft.com/office/drawing/2010/main">
+        <mc:Choice Requires="a14">
+          <p:sp>
+            <p:nvSpPr>
+              <p:cNvPr id="38" name="テキスト ボックス 37">
+                <a:extLst>
+                  <a:ext uri="{FF2B5EF4-FFF2-40B4-BE49-F238E27FC236}">
+                    <a16:creationId xmlns:a16="http://schemas.microsoft.com/office/drawing/2014/main" id="{6E455360-9A71-70DA-F323-04239AE5BC69}"/>
+                  </a:ext>
+                </a:extLst>
+              </p:cNvPr>
+              <p:cNvSpPr txBox="1"/>
+              <p:nvPr/>
+            </p:nvSpPr>
+            <p:spPr>
+              <a:xfrm>
+                <a:off x="3347361" y="4750956"/>
+                <a:ext cx="1496786" cy="369332"/>
+              </a:xfrm>
+              <a:prstGeom prst="rect">
+                <a:avLst/>
+              </a:prstGeom>
+              <a:noFill/>
+              <a:ln>
+                <a:solidFill>
+                  <a:schemeClr val="tx1"/>
+                </a:solidFill>
+              </a:ln>
+            </p:spPr>
+            <p:txBody>
+              <a:bodyPr wrap="square" rtlCol="0">
+                <a:spAutoFit/>
+              </a:bodyPr>
+              <a:lstStyle/>
+              <a:p>
+                <a:r>
+                  <a:rPr lang="ja-JP" altLang="en-US" dirty="0"/>
+                  <a:t>時点</a:t>
+                </a:r>
+                <a14:m>
+                  <m:oMath xmlns:m="http://schemas.openxmlformats.org/officeDocument/2006/math">
+                    <m:r>
+                      <a:rPr lang="en-US" altLang="ja-JP" b="0" i="1" smtClean="0">
+                        <a:latin typeface="Cambria Math" panose="02040503050406030204" pitchFamily="18" charset="0"/>
+                      </a:rPr>
+                      <m:t>𝑡</m:t>
+                    </m:r>
+                  </m:oMath>
+                </a14:m>
+                <a:r>
+                  <a:rPr kumimoji="1" lang="ja-JP" altLang="en-US" dirty="0"/>
+                  <a:t>で確定</a:t>
+                </a:r>
+              </a:p>
+            </p:txBody>
+          </p:sp>
+        </mc:Choice>
+        <mc:Fallback xmlns="">
+          <p:sp>
+            <p:nvSpPr>
+              <p:cNvPr id="38" name="テキスト ボックス 37">
+                <a:extLst>
+                  <a:ext uri="{FF2B5EF4-FFF2-40B4-BE49-F238E27FC236}">
+                    <a16:creationId xmlns:a16="http://schemas.microsoft.com/office/drawing/2014/main" id="{6E455360-9A71-70DA-F323-04239AE5BC69}"/>
+                  </a:ext>
+                </a:extLst>
+              </p:cNvPr>
+              <p:cNvSpPr txBox="1">
+                <a:spLocks noRot="1" noChangeAspect="1" noMove="1" noResize="1" noEditPoints="1" noAdjustHandles="1" noChangeArrowheads="1" noChangeShapeType="1" noTextEdit="1"/>
+              </p:cNvSpPr>
+              <p:nvPr/>
+            </p:nvSpPr>
+            <p:spPr>
+              <a:xfrm>
+                <a:off x="3347361" y="4750956"/>
+                <a:ext cx="1496786" cy="369332"/>
+              </a:xfrm>
+              <a:prstGeom prst="rect">
+                <a:avLst/>
+              </a:prstGeom>
+              <a:blipFill>
+                <a:blip r:embed="rId14"/>
+                <a:stretch>
+                  <a:fillRect l="-2823" t="-4762" b="-23810"/>
+                </a:stretch>
+              </a:blipFill>
+              <a:ln>
+                <a:solidFill>
+                  <a:schemeClr val="tx1"/>
+                </a:solidFill>
+              </a:ln>
+            </p:spPr>
+            <p:txBody>
+              <a:bodyPr/>
+              <a:lstStyle/>
+              <a:p>
+                <a:r>
+                  <a:rPr lang="ja-JP" altLang="en-US">
+                    <a:noFill/>
+                  </a:rPr>
+                  <a:t> </a:t>
+                </a:r>
+              </a:p>
+            </p:txBody>
+          </p:sp>
+        </mc:Fallback>
+      </mc:AlternateContent>
+      <mc:AlternateContent xmlns:mc="http://schemas.openxmlformats.org/markup-compatibility/2006" xmlns:a14="http://schemas.microsoft.com/office/drawing/2010/main">
+        <mc:Choice Requires="a14">
+          <p:sp>
+            <p:nvSpPr>
+              <p:cNvPr id="39" name="テキスト ボックス 38">
+                <a:extLst>
+                  <a:ext uri="{FF2B5EF4-FFF2-40B4-BE49-F238E27FC236}">
+                    <a16:creationId xmlns:a16="http://schemas.microsoft.com/office/drawing/2014/main" id="{005995AE-9F06-667E-EEAC-FF390DEC2BC8}"/>
+                  </a:ext>
+                </a:extLst>
+              </p:cNvPr>
+              <p:cNvSpPr txBox="1"/>
+              <p:nvPr/>
+            </p:nvSpPr>
+            <p:spPr>
+              <a:xfrm>
+                <a:off x="8289614" y="4407264"/>
+                <a:ext cx="2742773" cy="1200329"/>
+              </a:xfrm>
+              <a:prstGeom prst="rect">
+                <a:avLst/>
+              </a:prstGeom>
+              <a:noFill/>
+              <a:ln>
+                <a:solidFill>
+                  <a:schemeClr val="tx1"/>
+                </a:solidFill>
+              </a:ln>
+            </p:spPr>
+            <p:txBody>
+              <a:bodyPr wrap="square" rtlCol="0">
+                <a:spAutoFit/>
+              </a:bodyPr>
+              <a:lstStyle/>
+              <a:p>
+                <a:r>
+                  <a:rPr lang="ja-JP" altLang="en-US" dirty="0"/>
+                  <a:t>時点</a:t>
+                </a:r>
+                <a14:m>
+                  <m:oMath xmlns:m="http://schemas.openxmlformats.org/officeDocument/2006/math">
+                    <m:r>
+                      <a:rPr lang="en-US" altLang="ja-JP" b="0" i="1" smtClean="0">
+                        <a:latin typeface="Cambria Math" panose="02040503050406030204" pitchFamily="18" charset="0"/>
+                      </a:rPr>
+                      <m:t>𝑡</m:t>
+                    </m:r>
+                  </m:oMath>
+                </a14:m>
+                <a:r>
+                  <a:rPr kumimoji="1" lang="ja-JP" altLang="en-US" dirty="0"/>
+                  <a:t>で未確定</a:t>
+                </a:r>
+                <a:endParaRPr kumimoji="1" lang="en-US" altLang="ja-JP" dirty="0"/>
+              </a:p>
+              <a:p>
+                <a:r>
+                  <a:rPr lang="ja-JP" altLang="en-US" dirty="0"/>
+                  <a:t>時点</a:t>
+                </a:r>
+                <a14:m>
+                  <m:oMath xmlns:m="http://schemas.openxmlformats.org/officeDocument/2006/math">
+                    <m:r>
+                      <a:rPr lang="en-US" altLang="ja-JP" b="0" i="1" smtClean="0">
+                        <a:latin typeface="Cambria Math" panose="02040503050406030204" pitchFamily="18" charset="0"/>
+                      </a:rPr>
+                      <m:t>𝑡</m:t>
+                    </m:r>
+                    <m:r>
+                      <a:rPr lang="en-US" altLang="ja-JP" b="0" i="1" smtClean="0">
+                        <a:latin typeface="Cambria Math" panose="02040503050406030204" pitchFamily="18" charset="0"/>
+                      </a:rPr>
+                      <m:t>+1</m:t>
+                    </m:r>
+                  </m:oMath>
+                </a14:m>
+                <a:r>
+                  <a:rPr kumimoji="1" lang="ja-JP" altLang="en-US" dirty="0"/>
+                  <a:t>で実現した状態に依存して無リスク利子率が変化する</a:t>
+                </a:r>
+              </a:p>
+            </p:txBody>
+          </p:sp>
+        </mc:Choice>
+        <mc:Fallback xmlns="">
+          <p:sp>
+            <p:nvSpPr>
+              <p:cNvPr id="39" name="テキスト ボックス 38">
+                <a:extLst>
+                  <a:ext uri="{FF2B5EF4-FFF2-40B4-BE49-F238E27FC236}">
+                    <a16:creationId xmlns:a16="http://schemas.microsoft.com/office/drawing/2014/main" id="{005995AE-9F06-667E-EEAC-FF390DEC2BC8}"/>
+                  </a:ext>
+                </a:extLst>
+              </p:cNvPr>
+              <p:cNvSpPr txBox="1">
+                <a:spLocks noRot="1" noChangeAspect="1" noMove="1" noResize="1" noEditPoints="1" noAdjustHandles="1" noChangeArrowheads="1" noChangeShapeType="1" noTextEdit="1"/>
+              </p:cNvSpPr>
+              <p:nvPr/>
+            </p:nvSpPr>
+            <p:spPr>
+              <a:xfrm>
+                <a:off x="8289614" y="4407264"/>
+                <a:ext cx="2742773" cy="1200329"/>
+              </a:xfrm>
+              <a:prstGeom prst="rect">
+                <a:avLst/>
+              </a:prstGeom>
+              <a:blipFill>
+                <a:blip r:embed="rId15"/>
+                <a:stretch>
+                  <a:fillRect l="-1770" t="-2010" r="-1549" b="-6533"/>
+                </a:stretch>
+              </a:blipFill>
+              <a:ln>
+                <a:solidFill>
+                  <a:schemeClr val="tx1"/>
+                </a:solidFill>
+              </a:ln>
+            </p:spPr>
+            <p:txBody>
+              <a:bodyPr/>
+              <a:lstStyle/>
+              <a:p>
+                <a:r>
+                  <a:rPr lang="ja-JP" altLang="en-US">
+                    <a:noFill/>
+                  </a:rPr>
+                  <a:t> </a:t>
+                </a:r>
+              </a:p>
+            </p:txBody>
+          </p:sp>
+        </mc:Fallback>
+      </mc:AlternateContent>
+    </p:spTree>
+    <p:extLst>
+      <p:ext uri="{BB962C8B-B14F-4D97-AF65-F5344CB8AC3E}">
+        <p14:creationId xmlns:p14="http://schemas.microsoft.com/office/powerpoint/2010/main" val="3782565712"/>
+      </p:ext>
+    </p:extLst>
+  </p:cSld>
+  <p:clrMapOvr>
+    <a:masterClrMapping/>
+  </p:clrMapOvr>
+</p:sld>
+</file>
+
+<file path=ppt/slides/slide46.xml><?xml version="1.0" encoding="utf-8"?>
+<p:sld xmlns:a="http://schemas.openxmlformats.org/drawingml/2006/main" xmlns:r="http://schemas.openxmlformats.org/officeDocument/2006/relationships" xmlns:p="http://schemas.openxmlformats.org/presentationml/2006/main">
+  <p:cSld>
+    <p:spTree>
+      <p:nvGrpSpPr>
+        <p:cNvPr id="1" name="">
+          <a:extLst>
+            <a:ext uri="{FF2B5EF4-FFF2-40B4-BE49-F238E27FC236}">
+              <a16:creationId xmlns:a16="http://schemas.microsoft.com/office/drawing/2014/main" id="{8F0EC4D3-62CA-5F68-F8BB-55BE19EFFE91}"/>
+            </a:ext>
+          </a:extLst>
+        </p:cNvPr>
+        <p:cNvGrpSpPr/>
+        <p:nvPr/>
+      </p:nvGrpSpPr>
+      <p:grpSpPr>
+        <a:xfrm>
+          <a:off x="0" y="0"/>
+          <a:ext cx="0" cy="0"/>
+          <a:chOff x="0" y="0"/>
+          <a:chExt cx="0" cy="0"/>
+        </a:xfrm>
+      </p:grpSpPr>
+      <p:sp>
+        <p:nvSpPr>
+          <p:cNvPr id="2" name="タイトル 1">
+            <a:extLst>
+              <a:ext uri="{FF2B5EF4-FFF2-40B4-BE49-F238E27FC236}">
+                <a16:creationId xmlns:a16="http://schemas.microsoft.com/office/drawing/2014/main" id="{E2165D72-985B-AF38-E34A-506FE3FF6AA2}"/>
+              </a:ext>
+            </a:extLst>
+          </p:cNvPr>
+          <p:cNvSpPr>
+            <a:spLocks noGrp="1"/>
+          </p:cNvSpPr>
+          <p:nvPr>
+            <p:ph type="title"/>
+          </p:nvPr>
+        </p:nvSpPr>
+        <p:spPr>
+          <a:xfrm>
+            <a:off x="838200" y="365126"/>
+            <a:ext cx="10515600" cy="700350"/>
+          </a:xfrm>
+        </p:spPr>
+        <p:txBody>
+          <a:bodyPr>
+            <a:normAutofit/>
+          </a:bodyPr>
+          <a:lstStyle/>
+          <a:p>
+            <a:r>
+              <a:rPr lang="en-US" altLang="ja-JP" sz="2800" dirty="0"/>
+              <a:t>§6.1</a:t>
+            </a:r>
+            <a:r>
+              <a:rPr lang="ja-JP" altLang="en-US" sz="2800" dirty="0"/>
+              <a:t>　無リスク利子率の期間ごとの変化</a:t>
+            </a:r>
+            <a:endParaRPr kumimoji="1" lang="ja-JP" altLang="en-US" sz="2800" dirty="0"/>
+          </a:p>
+        </p:txBody>
+      </p:sp>
+      <mc:AlternateContent xmlns:mc="http://schemas.openxmlformats.org/markup-compatibility/2006" xmlns:a14="http://schemas.microsoft.com/office/drawing/2010/main">
+        <mc:Choice Requires="a14">
           <p:sp>
             <p:nvSpPr>
               <p:cNvPr id="3" name="コンテンツ プレースホルダー 2">
                 <a:extLst>
                   <a:ext uri="{FF2B5EF4-FFF2-40B4-BE49-F238E27FC236}">
-                    <a16:creationId xmlns:a16="http://schemas.microsoft.com/office/drawing/2014/main" id="{09B0E752-DFEC-9A62-5738-6551A6206C1D}"/>
+                    <a16:creationId xmlns:a16="http://schemas.microsoft.com/office/drawing/2014/main" id="{0FA04917-BAD8-C0D7-8385-3E897B1E850C}"/>
                   </a:ext>
                 </a:extLst>
               </p:cNvPr>
@@ -37696,34 +40536,24 @@
                 </a:pPr>
                 <a:r>
                   <a:rPr lang="en-US" altLang="ja-JP" sz="2000" dirty="0"/>
-                  <a:t>【Epstein=Zin</a:t>
+                  <a:t>【</a:t>
                 </a:r>
                 <a:r>
                   <a:rPr lang="ja-JP" altLang="en-US" sz="2000" dirty="0"/>
-                  <a:t>効用はべき型と対数型を包含している</a:t>
+                  <a:t>無リスク利子率が投資収益率に与える影響</a:t>
                 </a:r>
                 <a:r>
                   <a:rPr lang="en-US" altLang="ja-JP" sz="2000" dirty="0"/>
                   <a:t>】</a:t>
                 </a:r>
-                <a:br>
-                  <a:rPr lang="en-US" altLang="ja-JP" sz="2000" dirty="0"/>
-                </a:br>
+              </a:p>
+              <a:p>
+                <a:pPr marL="0" indent="0">
+                  <a:buNone/>
+                </a:pPr>
                 <a:r>
                   <a:rPr lang="ja-JP" altLang="en-US" sz="2000" dirty="0"/>
-                  <a:t>べき型：ケース</a:t>
-                </a:r>
-                <a:r>
-                  <a:rPr lang="en-US" altLang="ja-JP" sz="2000" dirty="0" err="1"/>
-                  <a:t>i</a:t>
-                </a:r>
-                <a:r>
-                  <a:rPr lang="en-US" altLang="ja-JP" sz="2000" dirty="0"/>
-                  <a:t>.</a:t>
-                </a:r>
-                <a:r>
-                  <a:rPr lang="ja-JP" altLang="en-US" sz="2000" dirty="0"/>
-                  <a:t>において、</a:t>
+                  <a:t>無リスク利子率の異時点間の変化の影響について考えるため、</a:t>
                 </a:r>
                 <a14:m>
                   <m:oMath xmlns:m="http://schemas.openxmlformats.org/officeDocument/2006/math">
@@ -37731,25 +40561,13 @@
                       <a:rPr lang="en-US" altLang="ja-JP" sz="2000" b="0" i="1" smtClean="0">
                         <a:latin typeface="Cambria Math" panose="02040503050406030204" pitchFamily="18" charset="0"/>
                       </a:rPr>
-                      <m:t>𝜓</m:t>
-                    </m:r>
-                    <m:r>
-                      <a:rPr lang="en-US" altLang="ja-JP" sz="2000" b="0" i="1" smtClean="0">
-                        <a:latin typeface="Cambria Math" panose="02040503050406030204" pitchFamily="18" charset="0"/>
-                      </a:rPr>
-                      <m:t>=1/</m:t>
-                    </m:r>
-                    <m:r>
-                      <a:rPr lang="en-US" altLang="ja-JP" sz="2000" b="0" i="1" smtClean="0">
-                        <a:latin typeface="Cambria Math" panose="02040503050406030204" pitchFamily="18" charset="0"/>
-                      </a:rPr>
-                      <m:t>𝛾</m:t>
+                      <m:t>𝐸𝐼𝑆</m:t>
                     </m:r>
                   </m:oMath>
                 </a14:m>
                 <a:r>
                   <a:rPr lang="ja-JP" altLang="en-US" sz="2000" dirty="0"/>
-                  <a:t>とすればよい</a:t>
+                  <a:t>との関連を思い出す。</a:t>
                 </a:r>
                 <a:endParaRPr lang="en-US" altLang="ja-JP" sz="2000" dirty="0"/>
               </a:p>
@@ -37758,16 +40576,34 @@
                   <a:buNone/>
                 </a:pPr>
                 <a:r>
+                  <a:rPr lang="en-US" altLang="ja-JP" sz="2000" dirty="0"/>
+                  <a:t>2</a:t>
+                </a:r>
+                <a:r>
                   <a:rPr lang="ja-JP" altLang="en-US" sz="2000" dirty="0"/>
-                  <a:t>対数型：ケース</a:t>
-                </a:r>
+                  <a:t>期間モデルにおいて、投資家が最適投資比率による投資を行うと仮定する。</a:t>
+                </a:r>
+                <a:endParaRPr lang="en-US" altLang="ja-JP" sz="2000" dirty="0"/>
+              </a:p>
+              <a:p>
+                <a:pPr marL="0" indent="0">
+                  <a:buNone/>
+                </a:pPr>
                 <a:r>
                   <a:rPr lang="en-US" altLang="ja-JP" sz="2000" dirty="0"/>
-                  <a:t>iv.</a:t>
+                  <a:t>§4.1</a:t>
                 </a:r>
                 <a:r>
                   <a:rPr lang="ja-JP" altLang="en-US" sz="2000" dirty="0"/>
-                  <a:t>において、</a:t>
+                  <a:t>で見たように、</a:t>
+                </a:r>
+                <a:r>
+                  <a:rPr lang="en-US" altLang="ja-JP" sz="2000" dirty="0"/>
+                  <a:t>1</a:t>
+                </a:r>
+                <a:r>
+                  <a:rPr lang="ja-JP" altLang="en-US" sz="2000" dirty="0"/>
+                  <a:t>階条件により</a:t>
                 </a:r>
                 <a:r>
                   <a:rPr lang="en-US" altLang="ja-JP" sz="2000" dirty="0"/>
@@ -37779,32 +40615,652 @@
                       <a:rPr lang="en-US" altLang="ja-JP" sz="2000" i="1">
                         <a:latin typeface="Cambria Math" panose="02040503050406030204" pitchFamily="18" charset="0"/>
                       </a:rPr>
-                      <m:t>𝜓</m:t>
+                      <m:t>𝑀𝑅</m:t>
+                    </m:r>
+                    <m:sSub>
+                      <m:sSubPr>
+                        <m:ctrlPr>
+                          <a:rPr lang="en-US" altLang="ja-JP" sz="2000" i="1">
+                            <a:latin typeface="Cambria Math" panose="02040503050406030204" pitchFamily="18" charset="0"/>
+                          </a:rPr>
+                        </m:ctrlPr>
+                      </m:sSubPr>
+                      <m:e>
+                        <m:r>
+                          <a:rPr lang="en-US" altLang="ja-JP" sz="2000" i="1">
+                            <a:latin typeface="Cambria Math" panose="02040503050406030204" pitchFamily="18" charset="0"/>
+                          </a:rPr>
+                          <m:t>𝑆</m:t>
+                        </m:r>
+                      </m:e>
+                      <m:sub>
+                        <m:sSub>
+                          <m:sSubPr>
+                            <m:ctrlPr>
+                              <a:rPr lang="en-US" altLang="ja-JP" sz="2000" i="1">
+                                <a:latin typeface="Cambria Math" panose="02040503050406030204" pitchFamily="18" charset="0"/>
+                              </a:rPr>
+                            </m:ctrlPr>
+                          </m:sSubPr>
+                          <m:e>
+                            <m:r>
+                              <a:rPr lang="en-US" altLang="ja-JP" sz="2000" i="1">
+                                <a:latin typeface="Cambria Math" panose="02040503050406030204" pitchFamily="18" charset="0"/>
+                              </a:rPr>
+                              <m:t>𝐶</m:t>
+                            </m:r>
+                          </m:e>
+                          <m:sub>
+                            <m:r>
+                              <a:rPr lang="en-US" altLang="ja-JP" sz="2000" i="1">
+                                <a:latin typeface="Cambria Math" panose="02040503050406030204" pitchFamily="18" charset="0"/>
+                              </a:rPr>
+                              <m:t>1</m:t>
+                            </m:r>
+                          </m:sub>
+                        </m:sSub>
+                        <m:r>
+                          <a:rPr lang="en-US" altLang="ja-JP" sz="2000" i="1">
+                            <a:latin typeface="Cambria Math" panose="02040503050406030204" pitchFamily="18" charset="0"/>
+                          </a:rPr>
+                          <m:t>,</m:t>
+                        </m:r>
+                        <m:sSubSup>
+                          <m:sSubSupPr>
+                            <m:ctrlPr>
+                              <a:rPr lang="en-US" altLang="ja-JP" sz="2000" i="1">
+                                <a:latin typeface="Cambria Math" panose="02040503050406030204" pitchFamily="18" charset="0"/>
+                              </a:rPr>
+                            </m:ctrlPr>
+                          </m:sSubSupPr>
+                          <m:e>
+                            <m:r>
+                              <a:rPr lang="en-US" altLang="ja-JP" sz="2000" i="1">
+                                <a:latin typeface="Cambria Math" panose="02040503050406030204" pitchFamily="18" charset="0"/>
+                              </a:rPr>
+                              <m:t>𝐶</m:t>
+                            </m:r>
+                          </m:e>
+                          <m:sub>
+                            <m:r>
+                              <a:rPr lang="en-US" altLang="ja-JP" sz="2000" i="1">
+                                <a:latin typeface="Cambria Math" panose="02040503050406030204" pitchFamily="18" charset="0"/>
+                              </a:rPr>
+                              <m:t>0</m:t>
+                            </m:r>
+                          </m:sub>
+                          <m:sup>
+                            <m:r>
+                              <a:rPr lang="en-US" altLang="ja-JP" sz="2000" i="1">
+                                <a:latin typeface="Cambria Math" panose="02040503050406030204" pitchFamily="18" charset="0"/>
+                              </a:rPr>
+                              <m:t>∗</m:t>
+                            </m:r>
+                          </m:sup>
+                        </m:sSubSup>
+                      </m:sub>
+                    </m:sSub>
+                    <m:r>
+                      <a:rPr lang="en-US" altLang="ja-JP" sz="2000" i="1">
+                        <a:latin typeface="Cambria Math" panose="02040503050406030204" pitchFamily="18" charset="0"/>
+                      </a:rPr>
+                      <m:t>=</m:t>
+                    </m:r>
+                    <m:f>
+                      <m:fPr>
+                        <m:ctrlPr>
+                          <a:rPr lang="en-US" altLang="ja-JP" sz="2000" i="1">
+                            <a:latin typeface="Cambria Math" panose="02040503050406030204" pitchFamily="18" charset="0"/>
+                          </a:rPr>
+                        </m:ctrlPr>
+                      </m:fPr>
+                      <m:num>
+                        <m:r>
+                          <a:rPr lang="en-US" altLang="ja-JP" sz="2000" i="1">
+                            <a:latin typeface="Cambria Math" panose="02040503050406030204" pitchFamily="18" charset="0"/>
+                          </a:rPr>
+                          <m:t>1</m:t>
+                        </m:r>
+                      </m:num>
+                      <m:den>
+                        <m:r>
+                          <a:rPr lang="en-US" altLang="ja-JP" sz="2000" i="1">
+                            <a:latin typeface="Cambria Math" panose="02040503050406030204" pitchFamily="18" charset="0"/>
+                          </a:rPr>
+                          <m:t>1+</m:t>
+                        </m:r>
+                        <m:sSub>
+                          <m:sSubPr>
+                            <m:ctrlPr>
+                              <a:rPr lang="en-US" altLang="ja-JP" sz="2000" i="1">
+                                <a:latin typeface="Cambria Math" panose="02040503050406030204" pitchFamily="18" charset="0"/>
+                              </a:rPr>
+                            </m:ctrlPr>
+                          </m:sSubPr>
+                          <m:e>
+                            <m:r>
+                              <a:rPr lang="en-US" altLang="ja-JP" sz="2000" i="1">
+                                <a:latin typeface="Cambria Math" panose="02040503050406030204" pitchFamily="18" charset="0"/>
+                              </a:rPr>
+                              <m:t>𝑅</m:t>
+                            </m:r>
+                          </m:e>
+                          <m:sub>
+                            <m:r>
+                              <a:rPr lang="en-US" altLang="ja-JP" sz="2000" i="1">
+                                <a:latin typeface="Cambria Math" panose="02040503050406030204" pitchFamily="18" charset="0"/>
+                              </a:rPr>
+                              <m:t>𝑓</m:t>
+                            </m:r>
+                          </m:sub>
+                        </m:sSub>
+                      </m:den>
+                    </m:f>
+                  </m:oMath>
+                </a14:m>
+                <a:r>
+                  <a:rPr lang="ja-JP" altLang="en-US" sz="2000" dirty="0"/>
+                  <a:t>が成立する。</a:t>
+                </a:r>
+                <a:endParaRPr lang="en-US" altLang="ja-JP" sz="2000" dirty="0"/>
+              </a:p>
+              <a:p>
+                <a:pPr marL="0" indent="0">
+                  <a:buNone/>
+                </a:pPr>
+                <a14:m>
+                  <m:oMath xmlns:m="http://schemas.openxmlformats.org/officeDocument/2006/math">
+                    <m:r>
+                      <a:rPr lang="en-US" altLang="ja-JP" sz="2000" b="0" i="1" smtClean="0">
+                        <a:latin typeface="Cambria Math" panose="02040503050406030204" pitchFamily="18" charset="0"/>
+                      </a:rPr>
+                      <m:t>𝐸𝐼𝑆</m:t>
+                    </m:r>
+                  </m:oMath>
+                </a14:m>
+                <a:r>
+                  <a:rPr lang="ja-JP" altLang="en-US" sz="2000" dirty="0"/>
+                  <a:t>の定義</a:t>
+                </a:r>
+                <a14:m>
+                  <m:oMath xmlns:m="http://schemas.openxmlformats.org/officeDocument/2006/math">
+                    <m:r>
+                      <a:rPr lang="en-US" altLang="ja-JP" sz="2000" i="1">
+                        <a:latin typeface="Cambria Math" panose="02040503050406030204" pitchFamily="18" charset="0"/>
+                      </a:rPr>
+                      <m:t>𝐸𝐼𝑆</m:t>
                     </m:r>
                     <m:r>
                       <a:rPr lang="en-US" altLang="ja-JP" sz="2000" i="1">
                         <a:latin typeface="Cambria Math" panose="02040503050406030204" pitchFamily="18" charset="0"/>
                       </a:rPr>
-                      <m:t>=1</m:t>
+                      <m:t>=−</m:t>
                     </m:r>
+                    <m:f>
+                      <m:fPr>
+                        <m:ctrlPr>
+                          <a:rPr lang="en-US" altLang="ja-JP" sz="2000" i="1">
+                            <a:latin typeface="Cambria Math" panose="02040503050406030204" pitchFamily="18" charset="0"/>
+                          </a:rPr>
+                        </m:ctrlPr>
+                      </m:fPr>
+                      <m:num>
+                        <m:r>
+                          <a:rPr lang="en-US" altLang="ja-JP" sz="2000" i="1">
+                            <a:latin typeface="Cambria Math" panose="02040503050406030204" pitchFamily="18" charset="0"/>
+                          </a:rPr>
+                          <m:t>𝑑</m:t>
+                        </m:r>
+                        <m:func>
+                          <m:funcPr>
+                            <m:ctrlPr>
+                              <a:rPr lang="en-US" altLang="ja-JP" sz="2000" i="1">
+                                <a:latin typeface="Cambria Math" panose="02040503050406030204" pitchFamily="18" charset="0"/>
+                              </a:rPr>
+                            </m:ctrlPr>
+                          </m:funcPr>
+                          <m:fName>
+                            <m:r>
+                              <m:rPr>
+                                <m:sty m:val="p"/>
+                              </m:rPr>
+                              <a:rPr lang="en-US" altLang="ja-JP" sz="2000">
+                                <a:latin typeface="Cambria Math" panose="02040503050406030204" pitchFamily="18" charset="0"/>
+                              </a:rPr>
+                              <m:t>ln</m:t>
+                            </m:r>
+                          </m:fName>
+                          <m:e>
+                            <m:d>
+                              <m:dPr>
+                                <m:ctrlPr>
+                                  <a:rPr lang="en-US" altLang="ja-JP" sz="2000" i="1">
+                                    <a:latin typeface="Cambria Math" panose="02040503050406030204" pitchFamily="18" charset="0"/>
+                                  </a:rPr>
+                                </m:ctrlPr>
+                              </m:dPr>
+                              <m:e>
+                                <m:sSub>
+                                  <m:sSubPr>
+                                    <m:ctrlPr>
+                                      <a:rPr lang="en-US" altLang="ja-JP" sz="2000" i="1">
+                                        <a:latin typeface="Cambria Math" panose="02040503050406030204" pitchFamily="18" charset="0"/>
+                                      </a:rPr>
+                                    </m:ctrlPr>
+                                  </m:sSubPr>
+                                  <m:e>
+                                    <m:r>
+                                      <a:rPr lang="en-US" altLang="ja-JP" sz="2000" i="1">
+                                        <a:latin typeface="Cambria Math" panose="02040503050406030204" pitchFamily="18" charset="0"/>
+                                      </a:rPr>
+                                      <m:t>𝐶</m:t>
+                                    </m:r>
+                                  </m:e>
+                                  <m:sub>
+                                    <m:r>
+                                      <a:rPr lang="en-US" altLang="ja-JP" sz="2000" i="1">
+                                        <a:latin typeface="Cambria Math" panose="02040503050406030204" pitchFamily="18" charset="0"/>
+                                      </a:rPr>
+                                      <m:t>1</m:t>
+                                    </m:r>
+                                  </m:sub>
+                                </m:sSub>
+                                <m:r>
+                                  <a:rPr lang="en-US" altLang="ja-JP" sz="2000" i="1">
+                                    <a:latin typeface="Cambria Math" panose="02040503050406030204" pitchFamily="18" charset="0"/>
+                                  </a:rPr>
+                                  <m:t>/</m:t>
+                                </m:r>
+                                <m:sSub>
+                                  <m:sSubPr>
+                                    <m:ctrlPr>
+                                      <a:rPr lang="en-US" altLang="ja-JP" sz="2000" i="1">
+                                        <a:latin typeface="Cambria Math" panose="02040503050406030204" pitchFamily="18" charset="0"/>
+                                      </a:rPr>
+                                    </m:ctrlPr>
+                                  </m:sSubPr>
+                                  <m:e>
+                                    <m:r>
+                                      <a:rPr lang="en-US" altLang="ja-JP" sz="2000" i="1">
+                                        <a:latin typeface="Cambria Math" panose="02040503050406030204" pitchFamily="18" charset="0"/>
+                                      </a:rPr>
+                                      <m:t>𝐶</m:t>
+                                    </m:r>
+                                  </m:e>
+                                  <m:sub>
+                                    <m:r>
+                                      <a:rPr lang="en-US" altLang="ja-JP" sz="2000" i="1">
+                                        <a:latin typeface="Cambria Math" panose="02040503050406030204" pitchFamily="18" charset="0"/>
+                                      </a:rPr>
+                                      <m:t>0</m:t>
+                                    </m:r>
+                                  </m:sub>
+                                </m:sSub>
+                              </m:e>
+                            </m:d>
+                          </m:e>
+                        </m:func>
+                      </m:num>
+                      <m:den>
+                        <m:r>
+                          <a:rPr lang="en-US" altLang="ja-JP" sz="2000" i="1">
+                            <a:latin typeface="Cambria Math" panose="02040503050406030204" pitchFamily="18" charset="0"/>
+                          </a:rPr>
+                          <m:t>𝑑</m:t>
+                        </m:r>
+                        <m:func>
+                          <m:funcPr>
+                            <m:ctrlPr>
+                              <a:rPr lang="en-US" altLang="ja-JP" sz="2000" i="1">
+                                <a:latin typeface="Cambria Math" panose="02040503050406030204" pitchFamily="18" charset="0"/>
+                              </a:rPr>
+                            </m:ctrlPr>
+                          </m:funcPr>
+                          <m:fName>
+                            <m:r>
+                              <m:rPr>
+                                <m:sty m:val="p"/>
+                              </m:rPr>
+                              <a:rPr lang="en-US" altLang="ja-JP" sz="2000">
+                                <a:latin typeface="Cambria Math" panose="02040503050406030204" pitchFamily="18" charset="0"/>
+                              </a:rPr>
+                              <m:t>ln</m:t>
+                            </m:r>
+                          </m:fName>
+                          <m:e>
+                            <m:d>
+                              <m:dPr>
+                                <m:ctrlPr>
+                                  <a:rPr lang="en-US" altLang="ja-JP" sz="2000" i="1">
+                                    <a:latin typeface="Cambria Math" panose="02040503050406030204" pitchFamily="18" charset="0"/>
+                                  </a:rPr>
+                                </m:ctrlPr>
+                              </m:dPr>
+                              <m:e>
+                                <m:r>
+                                  <a:rPr lang="en-US" altLang="ja-JP" sz="2000" i="1">
+                                    <a:latin typeface="Cambria Math" panose="02040503050406030204" pitchFamily="18" charset="0"/>
+                                  </a:rPr>
+                                  <m:t>𝑀𝑅</m:t>
+                                </m:r>
+                                <m:sSub>
+                                  <m:sSubPr>
+                                    <m:ctrlPr>
+                                      <a:rPr lang="en-US" altLang="ja-JP" sz="2000" i="1">
+                                        <a:latin typeface="Cambria Math" panose="02040503050406030204" pitchFamily="18" charset="0"/>
+                                      </a:rPr>
+                                    </m:ctrlPr>
+                                  </m:sSubPr>
+                                  <m:e>
+                                    <m:r>
+                                      <a:rPr lang="en-US" altLang="ja-JP" sz="2000" i="1">
+                                        <a:latin typeface="Cambria Math" panose="02040503050406030204" pitchFamily="18" charset="0"/>
+                                      </a:rPr>
+                                      <m:t>𝑆</m:t>
+                                    </m:r>
+                                  </m:e>
+                                  <m:sub>
+                                    <m:sSub>
+                                      <m:sSubPr>
+                                        <m:ctrlPr>
+                                          <a:rPr lang="en-US" altLang="ja-JP" sz="2000" i="1">
+                                            <a:latin typeface="Cambria Math" panose="02040503050406030204" pitchFamily="18" charset="0"/>
+                                          </a:rPr>
+                                        </m:ctrlPr>
+                                      </m:sSubPr>
+                                      <m:e>
+                                        <m:r>
+                                          <a:rPr lang="en-US" altLang="ja-JP" sz="2000" i="1">
+                                            <a:latin typeface="Cambria Math" panose="02040503050406030204" pitchFamily="18" charset="0"/>
+                                          </a:rPr>
+                                          <m:t>𝐶</m:t>
+                                        </m:r>
+                                      </m:e>
+                                      <m:sub>
+                                        <m:r>
+                                          <a:rPr lang="en-US" altLang="ja-JP" sz="2000" i="1">
+                                            <a:latin typeface="Cambria Math" panose="02040503050406030204" pitchFamily="18" charset="0"/>
+                                          </a:rPr>
+                                          <m:t>0</m:t>
+                                        </m:r>
+                                      </m:sub>
+                                    </m:sSub>
+                                    <m:r>
+                                      <a:rPr lang="en-US" altLang="ja-JP" sz="2000" i="1">
+                                        <a:latin typeface="Cambria Math" panose="02040503050406030204" pitchFamily="18" charset="0"/>
+                                      </a:rPr>
+                                      <m:t>,</m:t>
+                                    </m:r>
+                                    <m:sSub>
+                                      <m:sSubPr>
+                                        <m:ctrlPr>
+                                          <a:rPr lang="en-US" altLang="ja-JP" sz="2000" i="1">
+                                            <a:latin typeface="Cambria Math" panose="02040503050406030204" pitchFamily="18" charset="0"/>
+                                          </a:rPr>
+                                        </m:ctrlPr>
+                                      </m:sSubPr>
+                                      <m:e>
+                                        <m:r>
+                                          <a:rPr lang="en-US" altLang="ja-JP" sz="2000" i="1">
+                                            <a:latin typeface="Cambria Math" panose="02040503050406030204" pitchFamily="18" charset="0"/>
+                                          </a:rPr>
+                                          <m:t>𝐶</m:t>
+                                        </m:r>
+                                      </m:e>
+                                      <m:sub>
+                                        <m:r>
+                                          <a:rPr lang="en-US" altLang="ja-JP" sz="2000" i="1">
+                                            <a:latin typeface="Cambria Math" panose="02040503050406030204" pitchFamily="18" charset="0"/>
+                                          </a:rPr>
+                                          <m:t>1</m:t>
+                                        </m:r>
+                                      </m:sub>
+                                    </m:sSub>
+                                  </m:sub>
+                                </m:sSub>
+                              </m:e>
+                            </m:d>
+                          </m:e>
+                        </m:func>
+                      </m:den>
+                    </m:f>
                   </m:oMath>
                 </a14:m>
                 <a:r>
                   <a:rPr lang="ja-JP" altLang="en-US" sz="2000" dirty="0"/>
-                  <a:t>とすればよい</a:t>
-                </a:r>
+                  <a:t>より、</a:t>
+                </a:r>
+                <a:endParaRPr lang="en-US" altLang="ja-JP" sz="2000" dirty="0"/>
+              </a:p>
+              <a:p>
+                <a:pPr marL="0" indent="0">
+                  <a:buNone/>
+                </a:pPr>
+                <a14:m>
+                  <m:oMathPara xmlns:m="http://schemas.openxmlformats.org/officeDocument/2006/math">
+                    <m:oMathParaPr>
+                      <m:jc m:val="centerGroup"/>
+                    </m:oMathParaPr>
+                    <m:oMath xmlns:m="http://schemas.openxmlformats.org/officeDocument/2006/math">
+                      <m:r>
+                        <a:rPr lang="en-US" altLang="ja-JP" sz="2000" b="0" i="1" smtClean="0">
+                          <a:latin typeface="Cambria Math" panose="02040503050406030204" pitchFamily="18" charset="0"/>
+                        </a:rPr>
+                        <m:t>𝑑</m:t>
+                      </m:r>
+                      <m:func>
+                        <m:funcPr>
+                          <m:ctrlPr>
+                            <a:rPr lang="en-US" altLang="ja-JP" sz="2000" b="0" i="1" smtClean="0">
+                              <a:latin typeface="Cambria Math" panose="02040503050406030204" pitchFamily="18" charset="0"/>
+                            </a:rPr>
+                          </m:ctrlPr>
+                        </m:funcPr>
+                        <m:fName>
+                          <m:r>
+                            <m:rPr>
+                              <m:sty m:val="p"/>
+                            </m:rPr>
+                            <a:rPr lang="en-US" altLang="ja-JP" sz="2000" b="0" i="0" smtClean="0">
+                              <a:latin typeface="Cambria Math" panose="02040503050406030204" pitchFamily="18" charset="0"/>
+                            </a:rPr>
+                            <m:t>ln</m:t>
+                          </m:r>
+                        </m:fName>
+                        <m:e>
+                          <m:d>
+                            <m:dPr>
+                              <m:ctrlPr>
+                                <a:rPr lang="en-US" altLang="ja-JP" sz="2000" b="0" i="1" smtClean="0">
+                                  <a:latin typeface="Cambria Math" panose="02040503050406030204" pitchFamily="18" charset="0"/>
+                                </a:rPr>
+                              </m:ctrlPr>
+                            </m:dPr>
+                            <m:e>
+                              <m:f>
+                                <m:fPr>
+                                  <m:ctrlPr>
+                                    <a:rPr lang="en-US" altLang="ja-JP" sz="2000" b="0" i="1" smtClean="0">
+                                      <a:latin typeface="Cambria Math" panose="02040503050406030204" pitchFamily="18" charset="0"/>
+                                    </a:rPr>
+                                  </m:ctrlPr>
+                                </m:fPr>
+                                <m:num>
+                                  <m:sSub>
+                                    <m:sSubPr>
+                                      <m:ctrlPr>
+                                        <a:rPr lang="en-US" altLang="ja-JP" sz="2000" b="0" i="1" smtClean="0">
+                                          <a:latin typeface="Cambria Math" panose="02040503050406030204" pitchFamily="18" charset="0"/>
+                                        </a:rPr>
+                                      </m:ctrlPr>
+                                    </m:sSubPr>
+                                    <m:e>
+                                      <m:r>
+                                        <a:rPr lang="en-US" altLang="ja-JP" sz="2000" b="0" i="1" smtClean="0">
+                                          <a:latin typeface="Cambria Math" panose="02040503050406030204" pitchFamily="18" charset="0"/>
+                                        </a:rPr>
+                                        <m:t>𝐶</m:t>
+                                      </m:r>
+                                    </m:e>
+                                    <m:sub>
+                                      <m:r>
+                                        <a:rPr lang="en-US" altLang="ja-JP" sz="2000" b="0" i="1" smtClean="0">
+                                          <a:latin typeface="Cambria Math" panose="02040503050406030204" pitchFamily="18" charset="0"/>
+                                        </a:rPr>
+                                        <m:t>1</m:t>
+                                      </m:r>
+                                    </m:sub>
+                                  </m:sSub>
+                                </m:num>
+                                <m:den>
+                                  <m:sSub>
+                                    <m:sSubPr>
+                                      <m:ctrlPr>
+                                        <a:rPr lang="en-US" altLang="ja-JP" sz="2000" b="0" i="1" smtClean="0">
+                                          <a:latin typeface="Cambria Math" panose="02040503050406030204" pitchFamily="18" charset="0"/>
+                                        </a:rPr>
+                                      </m:ctrlPr>
+                                    </m:sSubPr>
+                                    <m:e>
+                                      <m:r>
+                                        <a:rPr lang="en-US" altLang="ja-JP" sz="2000" b="0" i="1" smtClean="0">
+                                          <a:latin typeface="Cambria Math" panose="02040503050406030204" pitchFamily="18" charset="0"/>
+                                        </a:rPr>
+                                        <m:t>𝐶</m:t>
+                                      </m:r>
+                                    </m:e>
+                                    <m:sub>
+                                      <m:r>
+                                        <a:rPr lang="en-US" altLang="ja-JP" sz="2000" b="0" i="1" smtClean="0">
+                                          <a:latin typeface="Cambria Math" panose="02040503050406030204" pitchFamily="18" charset="0"/>
+                                        </a:rPr>
+                                        <m:t>0</m:t>
+                                      </m:r>
+                                    </m:sub>
+                                  </m:sSub>
+                                </m:den>
+                              </m:f>
+                            </m:e>
+                          </m:d>
+                          <m:r>
+                            <a:rPr lang="en-US" altLang="ja-JP" sz="2000" b="0" i="1" smtClean="0">
+                              <a:latin typeface="Cambria Math" panose="02040503050406030204" pitchFamily="18" charset="0"/>
+                            </a:rPr>
+                            <m:t>=</m:t>
+                          </m:r>
+                          <m:r>
+                            <a:rPr lang="en-US" altLang="ja-JP" sz="2000" b="0" i="1" smtClean="0">
+                              <a:latin typeface="Cambria Math" panose="02040503050406030204" pitchFamily="18" charset="0"/>
+                            </a:rPr>
+                            <m:t>𝐸𝐼𝑆</m:t>
+                          </m:r>
+                          <m:r>
+                            <a:rPr lang="en-US" altLang="ja-JP" sz="2000" b="0" i="1" smtClean="0">
+                              <a:latin typeface="Cambria Math" panose="02040503050406030204" pitchFamily="18" charset="0"/>
+                            </a:rPr>
+                            <m:t>⋅</m:t>
+                          </m:r>
+                          <m:r>
+                            <a:rPr lang="en-US" altLang="ja-JP" sz="2000" b="0" i="1" smtClean="0">
+                              <a:latin typeface="Cambria Math" panose="02040503050406030204" pitchFamily="18" charset="0"/>
+                            </a:rPr>
+                            <m:t>𝑑</m:t>
+                          </m:r>
+                          <m:r>
+                            <a:rPr lang="en-US" altLang="ja-JP" sz="2000" b="0" i="1" smtClean="0">
+                              <a:latin typeface="Cambria Math" panose="02040503050406030204" pitchFamily="18" charset="0"/>
+                            </a:rPr>
+                            <m:t> </m:t>
+                          </m:r>
+                          <m:r>
+                            <m:rPr>
+                              <m:sty m:val="p"/>
+                            </m:rPr>
+                            <a:rPr lang="en-US" altLang="ja-JP" sz="2000" b="0" i="0" smtClean="0">
+                              <a:latin typeface="Cambria Math" panose="02040503050406030204" pitchFamily="18" charset="0"/>
+                            </a:rPr>
+                            <m:t>ln</m:t>
+                          </m:r>
+                          <m:r>
+                            <a:rPr lang="en-US" altLang="ja-JP" sz="2000" b="0" i="1" smtClean="0">
+                              <a:latin typeface="Cambria Math" panose="02040503050406030204" pitchFamily="18" charset="0"/>
+                            </a:rPr>
+                            <m:t>⁡(1+</m:t>
+                          </m:r>
+                          <m:sSub>
+                            <m:sSubPr>
+                              <m:ctrlPr>
+                                <a:rPr lang="en-US" altLang="ja-JP" sz="2000" b="0" i="1" smtClean="0">
+                                  <a:latin typeface="Cambria Math" panose="02040503050406030204" pitchFamily="18" charset="0"/>
+                                </a:rPr>
+                              </m:ctrlPr>
+                            </m:sSubPr>
+                            <m:e>
+                              <m:r>
+                                <a:rPr lang="en-US" altLang="ja-JP" sz="2000" b="0" i="1" smtClean="0">
+                                  <a:latin typeface="Cambria Math" panose="02040503050406030204" pitchFamily="18" charset="0"/>
+                                </a:rPr>
+                                <m:t>𝑅</m:t>
+                              </m:r>
+                            </m:e>
+                            <m:sub>
+                              <m:r>
+                                <a:rPr lang="en-US" altLang="ja-JP" sz="2000" b="0" i="1" smtClean="0">
+                                  <a:latin typeface="Cambria Math" panose="02040503050406030204" pitchFamily="18" charset="0"/>
+                                </a:rPr>
+                                <m:t>𝑓</m:t>
+                              </m:r>
+                            </m:sub>
+                          </m:sSub>
+                          <m:r>
+                            <a:rPr lang="en-US" altLang="ja-JP" sz="2000" b="0" i="1" smtClean="0">
+                              <a:latin typeface="Cambria Math" panose="02040503050406030204" pitchFamily="18" charset="0"/>
+                            </a:rPr>
+                            <m:t>)</m:t>
+                          </m:r>
+                        </m:e>
+                      </m:func>
+                    </m:oMath>
+                  </m:oMathPara>
+                </a14:m>
+                <a:endParaRPr lang="en-US" altLang="ja-JP" sz="2000" dirty="0"/>
+              </a:p>
+              <a:p>
+                <a:pPr marL="0" indent="0">
+                  <a:buNone/>
+                </a:pPr>
+                <a:r>
+                  <a:rPr lang="ja-JP" altLang="en-US" sz="2000" dirty="0"/>
+                  <a:t>となる。</a:t>
+                </a:r>
+                <a:endParaRPr lang="en-US" altLang="ja-JP" sz="2000" dirty="0"/>
+              </a:p>
+              <a:p>
+                <a:pPr marL="0" indent="0">
+                  <a:buNone/>
+                </a:pPr>
+                <a:r>
+                  <a:rPr lang="ja-JP" altLang="en-US" sz="2000" dirty="0"/>
+                  <a:t>仮に、考えうる将来において無リスク利子率が大きく上昇すると想定するならば、現在の消費を減らしてより大きな投資ポジションをとるべきということになる。</a:t>
+                </a:r>
+                <a:endParaRPr lang="en-US" altLang="ja-JP" sz="2000" dirty="0"/>
+              </a:p>
+              <a:p>
+                <a:pPr marL="0" indent="0">
+                  <a:buNone/>
+                </a:pPr>
                 <a:endParaRPr lang="en-US" altLang="ja-JP" sz="2000" dirty="0"/>
               </a:p>
             </p:txBody>
           </p:sp>
         </mc:Choice>
-        <mc:Fallback>
+        <mc:Fallback xmlns="">
           <p:sp>
             <p:nvSpPr>
               <p:cNvPr id="3" name="コンテンツ プレースホルダー 2">
                 <a:extLst>
                   <a:ext uri="{FF2B5EF4-FFF2-40B4-BE49-F238E27FC236}">
-                    <a16:creationId xmlns:a16="http://schemas.microsoft.com/office/drawing/2014/main" id="{09B0E752-DFEC-9A62-5738-6551A6206C1D}"/>
+                    <a16:creationId xmlns:a16="http://schemas.microsoft.com/office/drawing/2014/main" id="{0FA04917-BAD8-C0D7-8385-3E897B1E850C}"/>
                   </a:ext>
                 </a:extLst>
               </p:cNvPr>
@@ -37823,7 +41279,7 @@
               <a:blipFill>
                 <a:blip r:embed="rId2"/>
                 <a:stretch>
-                  <a:fillRect l="-571" t="-1074"/>
+                  <a:fillRect l="-571" t="-1074" r="-57"/>
                 </a:stretch>
               </a:blipFill>
             </p:spPr>
@@ -37845,7 +41301,462 @@
     </p:spTree>
     <p:extLst>
       <p:ext uri="{BB962C8B-B14F-4D97-AF65-F5344CB8AC3E}">
-        <p14:creationId xmlns:p14="http://schemas.microsoft.com/office/powerpoint/2010/main" val="3782565712"/>
+        <p14:creationId xmlns:p14="http://schemas.microsoft.com/office/powerpoint/2010/main" val="3411739770"/>
+      </p:ext>
+    </p:extLst>
+  </p:cSld>
+  <p:clrMapOvr>
+    <a:masterClrMapping/>
+  </p:clrMapOvr>
+</p:sld>
+</file>
+
+<file path=ppt/slides/slide47.xml><?xml version="1.0" encoding="utf-8"?>
+<p:sld xmlns:a="http://schemas.openxmlformats.org/drawingml/2006/main" xmlns:r="http://schemas.openxmlformats.org/officeDocument/2006/relationships" xmlns:p="http://schemas.openxmlformats.org/presentationml/2006/main">
+  <p:cSld>
+    <p:spTree>
+      <p:nvGrpSpPr>
+        <p:cNvPr id="1" name="">
+          <a:extLst>
+            <a:ext uri="{FF2B5EF4-FFF2-40B4-BE49-F238E27FC236}">
+              <a16:creationId xmlns:a16="http://schemas.microsoft.com/office/drawing/2014/main" id="{CF652E4F-66CC-AA56-5D2A-302834DA5601}"/>
+            </a:ext>
+          </a:extLst>
+        </p:cNvPr>
+        <p:cNvGrpSpPr/>
+        <p:nvPr/>
+      </p:nvGrpSpPr>
+      <p:grpSpPr>
+        <a:xfrm>
+          <a:off x="0" y="0"/>
+          <a:ext cx="0" cy="0"/>
+          <a:chOff x="0" y="0"/>
+          <a:chExt cx="0" cy="0"/>
+        </a:xfrm>
+      </p:grpSpPr>
+      <p:sp>
+        <p:nvSpPr>
+          <p:cNvPr id="2" name="タイトル 1">
+            <a:extLst>
+              <a:ext uri="{FF2B5EF4-FFF2-40B4-BE49-F238E27FC236}">
+                <a16:creationId xmlns:a16="http://schemas.microsoft.com/office/drawing/2014/main" id="{973A5F02-BB3E-4113-95E1-7793091FC9D5}"/>
+              </a:ext>
+            </a:extLst>
+          </p:cNvPr>
+          <p:cNvSpPr>
+            <a:spLocks noGrp="1"/>
+          </p:cNvSpPr>
+          <p:nvPr>
+            <p:ph type="title"/>
+          </p:nvPr>
+        </p:nvSpPr>
+        <p:spPr>
+          <a:xfrm>
+            <a:off x="838200" y="365126"/>
+            <a:ext cx="10515600" cy="700350"/>
+          </a:xfrm>
+        </p:spPr>
+        <p:txBody>
+          <a:bodyPr>
+            <a:normAutofit/>
+          </a:bodyPr>
+          <a:lstStyle/>
+          <a:p>
+            <a:r>
+              <a:rPr lang="en-US" altLang="ja-JP" sz="2800" dirty="0"/>
+              <a:t>§6.2</a:t>
+            </a:r>
+            <a:r>
+              <a:rPr lang="ja-JP" altLang="en-US" sz="2800" dirty="0"/>
+              <a:t>　リスク資産の投資収益率の平均回帰性をどう扱うか</a:t>
+            </a:r>
+            <a:endParaRPr kumimoji="1" lang="ja-JP" altLang="en-US" sz="2800" dirty="0"/>
+          </a:p>
+        </p:txBody>
+      </p:sp>
+      <p:sp>
+        <p:nvSpPr>
+          <p:cNvPr id="3" name="コンテンツ プレースホルダー 2">
+            <a:extLst>
+              <a:ext uri="{FF2B5EF4-FFF2-40B4-BE49-F238E27FC236}">
+                <a16:creationId xmlns:a16="http://schemas.microsoft.com/office/drawing/2014/main" id="{23731DEC-D83E-CCAD-C804-D9D7F9D0C8BE}"/>
+              </a:ext>
+            </a:extLst>
+          </p:cNvPr>
+          <p:cNvSpPr>
+            <a:spLocks noGrp="1"/>
+          </p:cNvSpPr>
+          <p:nvPr>
+            <p:ph idx="1"/>
+          </p:nvPr>
+        </p:nvSpPr>
+        <p:spPr>
+          <a:xfrm>
+            <a:off x="838199" y="1065476"/>
+            <a:ext cx="10673443" cy="5678224"/>
+          </a:xfrm>
+        </p:spPr>
+        <p:txBody>
+          <a:bodyPr>
+            <a:normAutofit/>
+          </a:bodyPr>
+          <a:lstStyle/>
+          <a:p>
+            <a:pPr marL="0" indent="0">
+              <a:buNone/>
+            </a:pPr>
+            <a:r>
+              <a:rPr lang="en-US" altLang="ja-JP" sz="2000" dirty="0"/>
+              <a:t>【</a:t>
+            </a:r>
+            <a:r>
+              <a:rPr lang="ja-JP" altLang="en-US" sz="2000" dirty="0"/>
+              <a:t>過去の実証分析</a:t>
+            </a:r>
+            <a:r>
+              <a:rPr lang="en-US" altLang="ja-JP" sz="2000" dirty="0"/>
+              <a:t>】</a:t>
+            </a:r>
+          </a:p>
+          <a:p>
+            <a:pPr marL="0" indent="0">
+              <a:buNone/>
+            </a:pPr>
+            <a:r>
+              <a:rPr lang="en-US" altLang="ja-JP" sz="2000" u="sng" dirty="0"/>
+              <a:t>Fama and French(1988)</a:t>
+            </a:r>
+          </a:p>
+          <a:p>
+            <a:pPr marL="0" indent="0">
+              <a:buNone/>
+            </a:pPr>
+            <a:r>
+              <a:rPr lang="ja-JP" altLang="en-US" sz="2000" dirty="0"/>
+              <a:t>長期リターン（</a:t>
+            </a:r>
+            <a:r>
+              <a:rPr lang="en-US" altLang="ja-JP" sz="2000" dirty="0"/>
+              <a:t>3~5</a:t>
+            </a:r>
+            <a:r>
+              <a:rPr lang="ja-JP" altLang="en-US" sz="2000" dirty="0"/>
+              <a:t>年）において自己共分散が負となる傾向がある</a:t>
+            </a:r>
+            <a:endParaRPr lang="en-US" altLang="ja-JP" sz="2000" dirty="0"/>
+          </a:p>
+          <a:p>
+            <a:pPr marL="0" indent="0">
+              <a:buNone/>
+            </a:pPr>
+            <a:r>
+              <a:rPr lang="en-US" altLang="ja-JP" sz="2000" u="sng" dirty="0"/>
+              <a:t>Poterba and Summers(1988)</a:t>
+            </a:r>
+          </a:p>
+          <a:p>
+            <a:pPr marL="0" indent="0">
+              <a:buNone/>
+            </a:pPr>
+            <a:r>
+              <a:rPr lang="ja-JP" altLang="en-US" sz="2000" dirty="0"/>
+              <a:t>分散比検定を用いて、長期リターンの分散が短期リターンの分散と有意に差があることを証明。この論文でも</a:t>
+            </a:r>
+            <a:r>
+              <a:rPr lang="en-US" altLang="ja-JP" sz="2000" dirty="0"/>
+              <a:t>3~5</a:t>
+            </a:r>
+            <a:r>
+              <a:rPr lang="ja-JP" altLang="en-US" sz="2000" dirty="0"/>
+              <a:t>年で有意とされている。</a:t>
+            </a:r>
+            <a:endParaRPr lang="en-US" altLang="ja-JP" sz="2000" dirty="0"/>
+          </a:p>
+          <a:p>
+            <a:pPr marL="0" indent="0">
+              <a:buNone/>
+            </a:pPr>
+            <a:r>
+              <a:rPr lang="en-US" altLang="ja-JP" sz="2000" u="sng" dirty="0"/>
+              <a:t>DeBondt and Thaler(1985)</a:t>
+            </a:r>
+          </a:p>
+          <a:p>
+            <a:pPr marL="0" indent="0">
+              <a:buNone/>
+            </a:pPr>
+            <a:r>
+              <a:rPr lang="en-US" altLang="ja-JP" sz="2000" dirty="0"/>
+              <a:t>Long-term Loser</a:t>
+            </a:r>
+            <a:r>
+              <a:rPr lang="ja-JP" altLang="en-US" sz="2000" dirty="0"/>
+              <a:t>（過去</a:t>
+            </a:r>
+            <a:r>
+              <a:rPr lang="en-US" altLang="ja-JP" sz="2000" dirty="0"/>
+              <a:t>5</a:t>
+            </a:r>
+            <a:r>
+              <a:rPr lang="ja-JP" altLang="en-US" sz="2000" dirty="0"/>
+              <a:t>年間に低収益率であった銘柄）は</a:t>
+            </a:r>
+            <a:r>
+              <a:rPr lang="en-US" altLang="ja-JP" sz="2000" dirty="0"/>
+              <a:t>Long-term Winner</a:t>
+            </a:r>
+            <a:r>
+              <a:rPr lang="ja-JP" altLang="en-US" sz="2000" dirty="0"/>
+              <a:t>と相対で見て以後</a:t>
+            </a:r>
+            <a:r>
+              <a:rPr lang="en-US" altLang="ja-JP" sz="2000" dirty="0"/>
+              <a:t>3</a:t>
+            </a:r>
+            <a:r>
+              <a:rPr lang="ja-JP" altLang="en-US" sz="2000" dirty="0"/>
+              <a:t>年間では明確に高い収益率を上げる。（長期リバーサル）</a:t>
+            </a:r>
+            <a:endParaRPr lang="en-US" altLang="ja-JP" sz="2000" dirty="0"/>
+          </a:p>
+          <a:p>
+            <a:pPr marL="0" indent="0">
+              <a:buNone/>
+            </a:pPr>
+            <a:r>
+              <a:rPr lang="en-US" altLang="ja-JP" sz="2000" u="sng" dirty="0"/>
+              <a:t>Jegadeesh and Titman(1993)</a:t>
+            </a:r>
+          </a:p>
+          <a:p>
+            <a:pPr marL="0" indent="0">
+              <a:buNone/>
+            </a:pPr>
+            <a:r>
+              <a:rPr lang="ja-JP" altLang="en-US" sz="2000" dirty="0"/>
+              <a:t>投資ホライズンが</a:t>
+            </a:r>
+            <a:r>
+              <a:rPr lang="en-US" altLang="ja-JP" sz="2000" dirty="0"/>
+              <a:t>6</a:t>
+            </a:r>
+            <a:r>
+              <a:rPr lang="ja-JP" altLang="en-US" sz="2000" dirty="0"/>
+              <a:t>か月から</a:t>
+            </a:r>
+            <a:r>
+              <a:rPr lang="en-US" altLang="ja-JP" sz="2000" dirty="0"/>
+              <a:t>18</a:t>
+            </a:r>
+            <a:r>
+              <a:rPr lang="ja-JP" altLang="en-US" sz="2000" dirty="0"/>
+              <a:t>か月程度の中期投資では、株式投資収益率は正の系列相関（中期モメンタム、平均乖離性）を持つ。</a:t>
+            </a:r>
+            <a:endParaRPr lang="en-US" altLang="ja-JP" sz="2000" dirty="0"/>
+          </a:p>
+          <a:p>
+            <a:pPr marL="0" indent="0">
+              <a:buNone/>
+            </a:pPr>
+            <a:r>
+              <a:rPr lang="ja-JP" altLang="en-US" sz="2000" dirty="0"/>
+              <a:t>一方、投資ホライズンが複数年を超えると負の自己相関が観測され、平均回帰性が顕著になるとしている。</a:t>
+            </a:r>
+            <a:endParaRPr lang="en-US" altLang="ja-JP" sz="2000" dirty="0"/>
+          </a:p>
+        </p:txBody>
+      </p:sp>
+    </p:spTree>
+    <p:extLst>
+      <p:ext uri="{BB962C8B-B14F-4D97-AF65-F5344CB8AC3E}">
+        <p14:creationId xmlns:p14="http://schemas.microsoft.com/office/powerpoint/2010/main" val="885203132"/>
+      </p:ext>
+    </p:extLst>
+  </p:cSld>
+  <p:clrMapOvr>
+    <a:masterClrMapping/>
+  </p:clrMapOvr>
+</p:sld>
+</file>
+
+<file path=ppt/slides/slide48.xml><?xml version="1.0" encoding="utf-8"?>
+<p:sld xmlns:a="http://schemas.openxmlformats.org/drawingml/2006/main" xmlns:r="http://schemas.openxmlformats.org/officeDocument/2006/relationships" xmlns:p="http://schemas.openxmlformats.org/presentationml/2006/main">
+  <p:cSld>
+    <p:spTree>
+      <p:nvGrpSpPr>
+        <p:cNvPr id="1" name="">
+          <a:extLst>
+            <a:ext uri="{FF2B5EF4-FFF2-40B4-BE49-F238E27FC236}">
+              <a16:creationId xmlns:a16="http://schemas.microsoft.com/office/drawing/2014/main" id="{D06DC071-3DC2-8AB5-12F4-CC428DE537BC}"/>
+            </a:ext>
+          </a:extLst>
+        </p:cNvPr>
+        <p:cNvGrpSpPr/>
+        <p:nvPr/>
+      </p:nvGrpSpPr>
+      <p:grpSpPr>
+        <a:xfrm>
+          <a:off x="0" y="0"/>
+          <a:ext cx="0" cy="0"/>
+          <a:chOff x="0" y="0"/>
+          <a:chExt cx="0" cy="0"/>
+        </a:xfrm>
+      </p:grpSpPr>
+      <p:sp>
+        <p:nvSpPr>
+          <p:cNvPr id="2" name="タイトル 1">
+            <a:extLst>
+              <a:ext uri="{FF2B5EF4-FFF2-40B4-BE49-F238E27FC236}">
+                <a16:creationId xmlns:a16="http://schemas.microsoft.com/office/drawing/2014/main" id="{B58966AB-5530-FBB9-AF9E-2BA73F40E232}"/>
+              </a:ext>
+            </a:extLst>
+          </p:cNvPr>
+          <p:cNvSpPr>
+            <a:spLocks noGrp="1"/>
+          </p:cNvSpPr>
+          <p:nvPr>
+            <p:ph type="title"/>
+          </p:nvPr>
+        </p:nvSpPr>
+        <p:spPr>
+          <a:xfrm>
+            <a:off x="838200" y="365126"/>
+            <a:ext cx="10515600" cy="700350"/>
+          </a:xfrm>
+        </p:spPr>
+        <p:txBody>
+          <a:bodyPr>
+            <a:normAutofit/>
+          </a:bodyPr>
+          <a:lstStyle/>
+          <a:p>
+            <a:r>
+              <a:rPr lang="en-US" altLang="ja-JP" sz="2800" dirty="0"/>
+              <a:t>§6.2</a:t>
+            </a:r>
+            <a:r>
+              <a:rPr lang="ja-JP" altLang="en-US" sz="2800" dirty="0"/>
+              <a:t>　リスク資産の投資収益率の平均回帰性をどう扱うか</a:t>
+            </a:r>
+            <a:endParaRPr kumimoji="1" lang="ja-JP" altLang="en-US" sz="2800" dirty="0"/>
+          </a:p>
+        </p:txBody>
+      </p:sp>
+      <p:sp>
+        <p:nvSpPr>
+          <p:cNvPr id="3" name="コンテンツ プレースホルダー 2">
+            <a:extLst>
+              <a:ext uri="{FF2B5EF4-FFF2-40B4-BE49-F238E27FC236}">
+                <a16:creationId xmlns:a16="http://schemas.microsoft.com/office/drawing/2014/main" id="{6B99EB83-854D-8E48-959C-BBCFE125B5D0}"/>
+              </a:ext>
+            </a:extLst>
+          </p:cNvPr>
+          <p:cNvSpPr>
+            <a:spLocks noGrp="1"/>
+          </p:cNvSpPr>
+          <p:nvPr>
+            <p:ph idx="1"/>
+          </p:nvPr>
+        </p:nvSpPr>
+        <p:spPr>
+          <a:xfrm>
+            <a:off x="838199" y="1065476"/>
+            <a:ext cx="10673443" cy="5678224"/>
+          </a:xfrm>
+        </p:spPr>
+        <p:txBody>
+          <a:bodyPr>
+            <a:normAutofit/>
+          </a:bodyPr>
+          <a:lstStyle/>
+          <a:p>
+            <a:pPr marL="0" indent="0">
+              <a:buNone/>
+            </a:pPr>
+            <a:r>
+              <a:rPr lang="ja-JP" altLang="en-US" sz="2000" dirty="0"/>
+              <a:t>実証分析にある通り、負の自己相関が存在する場合、</a:t>
+            </a:r>
+            <a:r>
+              <a:rPr lang="en-US" altLang="ja-JP" sz="2000" dirty="0" err="1"/>
+              <a:t>i.i.d.</a:t>
+            </a:r>
+            <a:r>
+              <a:rPr lang="ja-JP" altLang="en-US" sz="2000" dirty="0"/>
+              <a:t>を仮定する場合と比べて分散が減少する。</a:t>
+            </a:r>
+            <a:endParaRPr lang="en-US" altLang="ja-JP" sz="2000" dirty="0"/>
+          </a:p>
+          <a:p>
+            <a:pPr marL="0" indent="0">
+              <a:buNone/>
+            </a:pPr>
+            <a:r>
+              <a:rPr lang="ja-JP" altLang="en-US" sz="2000" dirty="0"/>
+              <a:t>上記ゆえ、分布が変化するため、自己相関の有無によりリスク性資産への投資比率が変化する。</a:t>
+            </a:r>
+            <a:endParaRPr lang="en-US" altLang="ja-JP" sz="2000" dirty="0"/>
+          </a:p>
+          <a:p>
+            <a:pPr marL="0" indent="0">
+              <a:buNone/>
+            </a:pPr>
+            <a:endParaRPr lang="en-US" altLang="ja-JP" sz="2000" dirty="0"/>
+          </a:p>
+          <a:p>
+            <a:pPr marL="0" indent="0">
+              <a:buNone/>
+            </a:pPr>
+            <a:r>
+              <a:rPr lang="ja-JP" altLang="en-US" sz="2000" dirty="0"/>
+              <a:t>投資家が対数型効用に従う場合、自己相関の有無や投資ホライズンの長短に依らず、投資比率は一定となる。</a:t>
+            </a:r>
+            <a:endParaRPr lang="en-US" altLang="ja-JP" sz="2000" dirty="0"/>
+          </a:p>
+          <a:p>
+            <a:pPr marL="0" indent="0">
+              <a:buNone/>
+            </a:pPr>
+            <a:r>
+              <a:rPr lang="ja-JP" altLang="en-US" sz="2000" dirty="0"/>
+              <a:t>投資家がべき型効用に従い、相対的リスク回避度が正の場合、平均回帰性を持つ資産への投資比率は投資ホライズンの長期に応じて増加する。</a:t>
+            </a:r>
+            <a:endParaRPr lang="en-US" altLang="ja-JP" sz="2000" dirty="0"/>
+          </a:p>
+          <a:p>
+            <a:pPr marL="0" indent="0">
+              <a:buNone/>
+            </a:pPr>
+            <a:r>
+              <a:rPr lang="ja-JP" altLang="en-US" sz="2000" dirty="0"/>
+              <a:t>（長期化することで分散を抑えることができ、分散の下がった資産への投資を増やす）</a:t>
+            </a:r>
+            <a:endParaRPr lang="en-US" altLang="ja-JP" sz="2000" dirty="0"/>
+          </a:p>
+          <a:p>
+            <a:pPr marL="0" indent="0">
+              <a:buNone/>
+            </a:pPr>
+            <a:endParaRPr lang="en-US" altLang="ja-JP" sz="2000" dirty="0"/>
+          </a:p>
+          <a:p>
+            <a:pPr marL="0" indent="0">
+              <a:buNone/>
+            </a:pPr>
+            <a:endParaRPr lang="en-US" altLang="ja-JP" sz="2000" dirty="0"/>
+          </a:p>
+          <a:p>
+            <a:pPr marL="0" indent="0">
+              <a:buNone/>
+            </a:pPr>
+            <a:endParaRPr lang="en-US" altLang="ja-JP" sz="2000" dirty="0"/>
+          </a:p>
+        </p:txBody>
+      </p:sp>
+    </p:spTree>
+    <p:extLst>
+      <p:ext uri="{BB962C8B-B14F-4D97-AF65-F5344CB8AC3E}">
+        <p14:creationId xmlns:p14="http://schemas.microsoft.com/office/powerpoint/2010/main" val="2558905013"/>
       </p:ext>
     </p:extLst>
   </p:cSld>
